--- a/RAG_Pipeline_Explained.pptx
+++ b/RAG_Pipeline_Explained.pptx
@@ -4,18 +4,22 @@
   <p:sldMasterIdLst>
     <p:sldMasterId id="2147483648" r:id="rId1"/>
   </p:sldMasterIdLst>
+  <p:notesMasterIdLst>
+    <p:notesMasterId r:id="rId11"/>
+  </p:notesMasterIdLst>
   <p:sldIdLst>
-    <p:sldId id="256" r:id="rId7"/>
-    <p:sldId id="257" r:id="rId8"/>
-    <p:sldId id="258" r:id="rId9"/>
-    <p:sldId id="259" r:id="rId10"/>
-    <p:sldId id="260" r:id="rId11"/>
-    <p:sldId id="261" r:id="rId12"/>
-    <p:sldId id="262" r:id="rId13"/>
-    <p:sldId id="263" r:id="rId14"/>
-    <p:sldId id="264" r:id="rId15"/>
+    <p:sldId id="256" r:id="rId2"/>
+    <p:sldId id="257" r:id="rId3"/>
+    <p:sldId id="258" r:id="rId4"/>
+    <p:sldId id="259" r:id="rId5"/>
+    <p:sldId id="260" r:id="rId6"/>
+    <p:sldId id="261" r:id="rId7"/>
+    <p:sldId id="262" r:id="rId8"/>
+    <p:sldId id="263" r:id="rId9"/>
+    <p:sldId id="265" r:id="rId16"/>
+    <p:sldId id="264" r:id="rId10"/>
   </p:sldIdLst>
-  <p:sldSz cx="12188952" cy="6858000" type="screen4x3"/>
+  <p:sldSz cx="12188825" cy="6858000"/>
   <p:notesSz cx="6858000" cy="9144000"/>
   <p:defaultTextStyle>
     <a:defPPr>
@@ -112,7 +116,1792 @@
       </a:defRPr>
     </a:lvl9pPr>
   </p:defaultTextStyle>
+  <p:extLst>
+    <p:ext uri="{EFAFB233-063F-42B5-8137-9DF3F51BA10A}">
+      <p15:sldGuideLst xmlns:p15="http://schemas.microsoft.com/office/powerpoint/2012/main">
+        <p15:guide id="1" orient="horz" pos="2160">
+          <p15:clr>
+            <a:srgbClr val="A4A3A4"/>
+          </p15:clr>
+        </p15:guide>
+        <p15:guide id="2" pos="2880">
+          <p15:clr>
+            <a:srgbClr val="A4A3A4"/>
+          </p15:clr>
+        </p15:guide>
+      </p15:sldGuideLst>
+    </p:ext>
+  </p:extLst>
 </p:presentation>
+</file>
+
+<file path=ppt/notesMasters/notesMaster1.xml><?xml version="1.0" encoding="utf-8"?>
+<p:notesMaster xmlns:a="http://schemas.openxmlformats.org/drawingml/2006/main" xmlns:r="http://schemas.openxmlformats.org/officeDocument/2006/relationships" xmlns:p="http://schemas.openxmlformats.org/presentationml/2006/main">
+  <p:cSld>
+    <p:bg>
+      <p:bgRef idx="1001">
+        <a:schemeClr val="bg1"/>
+      </p:bgRef>
+    </p:bg>
+    <p:spTree>
+      <p:nvGrpSpPr>
+        <p:cNvPr id="1" name=""/>
+        <p:cNvGrpSpPr/>
+        <p:nvPr/>
+      </p:nvGrpSpPr>
+      <p:grpSpPr>
+        <a:xfrm>
+          <a:off x="0" y="0"/>
+          <a:ext cx="0" cy="0"/>
+          <a:chOff x="0" y="0"/>
+          <a:chExt cx="0" cy="0"/>
+        </a:xfrm>
+      </p:grpSpPr>
+    </p:spTree>
+    <p:extLst>
+      <p:ext uri="{BB962C8B-B14F-4D97-AF65-F5344CB8AC3E}">
+        <p14:creationId xmlns:p14="http://schemas.microsoft.com/office/powerpoint/2010/main" val="569272249"/>
+      </p:ext>
+    </p:extLst>
+  </p:cSld>
+  <p:clrMap bg1="lt1" tx1="dk1" bg2="lt2" tx2="dk2" accent1="accent1" accent2="accent2" accent3="accent3" accent4="accent4" accent5="accent5" accent6="accent6" hlink="hlink" folHlink="folHlink"/>
+  <p:notesStyle>
+    <a:lvl1pPr marL="0" algn="l" defTabSz="914400" rtl="0" eaLnBrk="1" latinLnBrk="0" hangingPunct="1">
+      <a:defRPr sz="1200" kern="1200">
+        <a:solidFill>
+          <a:schemeClr val="tx1"/>
+        </a:solidFill>
+        <a:latin typeface="+mn-lt"/>
+        <a:ea typeface="+mn-ea"/>
+        <a:cs typeface="+mn-cs"/>
+      </a:defRPr>
+    </a:lvl1pPr>
+    <a:lvl2pPr marL="457200" algn="l" defTabSz="914400" rtl="0" eaLnBrk="1" latinLnBrk="0" hangingPunct="1">
+      <a:defRPr sz="1200" kern="1200">
+        <a:solidFill>
+          <a:schemeClr val="tx1"/>
+        </a:solidFill>
+        <a:latin typeface="+mn-lt"/>
+        <a:ea typeface="+mn-ea"/>
+        <a:cs typeface="+mn-cs"/>
+      </a:defRPr>
+    </a:lvl2pPr>
+    <a:lvl3pPr marL="914400" algn="l" defTabSz="914400" rtl="0" eaLnBrk="1" latinLnBrk="0" hangingPunct="1">
+      <a:defRPr sz="1200" kern="1200">
+        <a:solidFill>
+          <a:schemeClr val="tx1"/>
+        </a:solidFill>
+        <a:latin typeface="+mn-lt"/>
+        <a:ea typeface="+mn-ea"/>
+        <a:cs typeface="+mn-cs"/>
+      </a:defRPr>
+    </a:lvl3pPr>
+    <a:lvl4pPr marL="1371600" algn="l" defTabSz="914400" rtl="0" eaLnBrk="1" latinLnBrk="0" hangingPunct="1">
+      <a:defRPr sz="1200" kern="1200">
+        <a:solidFill>
+          <a:schemeClr val="tx1"/>
+        </a:solidFill>
+        <a:latin typeface="+mn-lt"/>
+        <a:ea typeface="+mn-ea"/>
+        <a:cs typeface="+mn-cs"/>
+      </a:defRPr>
+    </a:lvl4pPr>
+    <a:lvl5pPr marL="1828800" algn="l" defTabSz="914400" rtl="0" eaLnBrk="1" latinLnBrk="0" hangingPunct="1">
+      <a:defRPr sz="1200" kern="1200">
+        <a:solidFill>
+          <a:schemeClr val="tx1"/>
+        </a:solidFill>
+        <a:latin typeface="+mn-lt"/>
+        <a:ea typeface="+mn-ea"/>
+        <a:cs typeface="+mn-cs"/>
+      </a:defRPr>
+    </a:lvl5pPr>
+    <a:lvl6pPr marL="2286000" algn="l" defTabSz="914400" rtl="0" eaLnBrk="1" latinLnBrk="0" hangingPunct="1">
+      <a:defRPr sz="1200" kern="1200">
+        <a:solidFill>
+          <a:schemeClr val="tx1"/>
+        </a:solidFill>
+        <a:latin typeface="+mn-lt"/>
+        <a:ea typeface="+mn-ea"/>
+        <a:cs typeface="+mn-cs"/>
+      </a:defRPr>
+    </a:lvl6pPr>
+    <a:lvl7pPr marL="2743200" algn="l" defTabSz="914400" rtl="0" eaLnBrk="1" latinLnBrk="0" hangingPunct="1">
+      <a:defRPr sz="1200" kern="1200">
+        <a:solidFill>
+          <a:schemeClr val="tx1"/>
+        </a:solidFill>
+        <a:latin typeface="+mn-lt"/>
+        <a:ea typeface="+mn-ea"/>
+        <a:cs typeface="+mn-cs"/>
+      </a:defRPr>
+    </a:lvl7pPr>
+    <a:lvl8pPr marL="3200400" algn="l" defTabSz="914400" rtl="0" eaLnBrk="1" latinLnBrk="0" hangingPunct="1">
+      <a:defRPr sz="1200" kern="1200">
+        <a:solidFill>
+          <a:schemeClr val="tx1"/>
+        </a:solidFill>
+        <a:latin typeface="+mn-lt"/>
+        <a:ea typeface="+mn-ea"/>
+        <a:cs typeface="+mn-cs"/>
+      </a:defRPr>
+    </a:lvl8pPr>
+    <a:lvl9pPr marL="3657600" algn="l" defTabSz="914400" rtl="0" eaLnBrk="1" latinLnBrk="0" hangingPunct="1">
+      <a:defRPr sz="1200" kern="1200">
+        <a:solidFill>
+          <a:schemeClr val="tx1"/>
+        </a:solidFill>
+        <a:latin typeface="+mn-lt"/>
+        <a:ea typeface="+mn-ea"/>
+        <a:cs typeface="+mn-cs"/>
+      </a:defRPr>
+    </a:lvl9pPr>
+  </p:notesStyle>
+</p:notesMaster>
+</file>
+
+<file path=ppt/notesSlides/notesSlide1.xml><?xml version="1.0" encoding="utf-8"?>
+<p:notes xmlns:a="http://schemas.openxmlformats.org/drawingml/2006/main" xmlns:r="http://schemas.openxmlformats.org/officeDocument/2006/relationships" xmlns:p="http://schemas.openxmlformats.org/presentationml/2006/main">
+  <p:cSld>
+    <p:spTree>
+      <p:nvGrpSpPr>
+        <p:cNvPr id="1" name=""/>
+        <p:cNvGrpSpPr/>
+        <p:nvPr/>
+      </p:nvGrpSpPr>
+      <p:grpSpPr>
+        <a:xfrm>
+          <a:off x="0" y="0"/>
+          <a:ext cx="0" cy="0"/>
+          <a:chOff x="0" y="0"/>
+          <a:chExt cx="0" cy="0"/>
+        </a:xfrm>
+      </p:grpSpPr>
+      <p:sp>
+        <p:nvSpPr>
+          <p:cNvPr id="2" name="Slide Image Placeholder 1"/>
+          <p:cNvSpPr>
+            <a:spLocks noGrp="1" noRot="1" noChangeAspect="1"/>
+          </p:cNvSpPr>
+          <p:nvPr>
+            <p:ph type="sldImg" idx="2"/>
+          </p:nvPr>
+        </p:nvSpPr>
+        <p:spPr/>
+      </p:sp>
+      <p:sp>
+        <p:nvSpPr>
+          <p:cNvPr id="3" name="Notes Placeholder 2"/>
+          <p:cNvSpPr>
+            <a:spLocks noGrp="1"/>
+          </p:cNvSpPr>
+          <p:nvPr>
+            <p:ph type="body" sz="quarter" idx="3"/>
+          </p:nvPr>
+        </p:nvSpPr>
+        <p:spPr/>
+        <p:txBody>
+          <a:bodyPr/>
+          <a:lstStyle/>
+          <a:p>
+            <a:r>
+              <a:t>Hey everyone, welcome! 👋</a:t>
+            </a:r>
+          </a:p>
+          <a:p>
+            <a:endParaRPr/>
+          </a:p>
+          <a:p>
+            <a:r>
+              <a:t>So today we're going to talk about something really interesting — RAG, which stands for Retrieval-Augmented Generation.</a:t>
+            </a:r>
+          </a:p>
+          <a:p>
+            <a:endParaRPr/>
+          </a:p>
+          <a:p>
+            <a:r>
+              <a:t>Before I jump into what RAG is, let me ask you guys a quick question…</a:t>
+            </a:r>
+          </a:p>
+          <a:p>
+            <a:endParaRPr/>
+          </a:p>
+          <a:p>
+            <a:r>
+              <a:t>🗣️ [ASK THE AUDIENCE]: "Has anyone here used ChatGPT? Raise your hands."</a:t>
+            </a:r>
+          </a:p>
+          <a:p>
+            <a:endParaRPr/>
+          </a:p>
+          <a:p>
+            <a:r>
+              <a:t>Great. Now — "Have you ever asked ChatGPT about your company's internal policies? Like, 'How many leaves do I get?' or 'What's our WFH policy?'"</a:t>
+            </a:r>
+          </a:p>
+          <a:p>
+            <a:endParaRPr/>
+          </a:p>
+          <a:p>
+            <a:r>
+              <a:t>It can't answer, right? And that's EXACTLY the problem we're solving today.</a:t>
+            </a:r>
+          </a:p>
+          <a:p>
+            <a:endParaRPr/>
+          </a:p>
+          <a:p>
+            <a:r>
+              <a:t>We built a small demo using Python, Flask, OpenAI, and ChromaDB — and by the end of this session, you'll understand every single line of code behind it.</a:t>
+            </a:r>
+          </a:p>
+          <a:p>
+            <a:endParaRPr/>
+          </a:p>
+          <a:p>
+            <a:r>
+              <a:t>Let's get started! 🚀</a:t>
+            </a:r>
+          </a:p>
+        </p:txBody>
+      </p:sp>
+      <p:sp>
+        <p:nvSpPr>
+          <p:cNvPr id="4" name="Slide Number Placeholder 3"/>
+          <p:cNvSpPr>
+            <a:spLocks noGrp="1"/>
+          </p:cNvSpPr>
+          <p:nvPr>
+            <p:ph type="sldNum" sz="quarter" idx="5"/>
+          </p:nvPr>
+        </p:nvSpPr>
+        <p:spPr/>
+      </p:sp>
+    </p:spTree>
+  </p:cSld>
+  <p:clrMapOvr>
+    <a:masterClrMapping/>
+  </p:clrMapOvr>
+</p:notes>
+</file>
+
+<file path=ppt/notesSlides/notesSlide2.xml><?xml version="1.0" encoding="utf-8"?>
+<p:notes xmlns:a="http://schemas.openxmlformats.org/drawingml/2006/main" xmlns:r="http://schemas.openxmlformats.org/officeDocument/2006/relationships" xmlns:p="http://schemas.openxmlformats.org/presentationml/2006/main">
+  <p:cSld>
+    <p:spTree>
+      <p:nvGrpSpPr>
+        <p:cNvPr id="1" name=""/>
+        <p:cNvGrpSpPr/>
+        <p:nvPr/>
+      </p:nvGrpSpPr>
+      <p:grpSpPr>
+        <a:xfrm>
+          <a:off x="0" y="0"/>
+          <a:ext cx="0" cy="0"/>
+          <a:chOff x="0" y="0"/>
+          <a:chExt cx="0" cy="0"/>
+        </a:xfrm>
+      </p:grpSpPr>
+      <p:sp>
+        <p:nvSpPr>
+          <p:cNvPr id="2" name="Slide Image Placeholder 1"/>
+          <p:cNvSpPr>
+            <a:spLocks noGrp="1" noRot="1" noChangeAspect="1"/>
+          </p:cNvSpPr>
+          <p:nvPr>
+            <p:ph type="sldImg" idx="2"/>
+          </p:nvPr>
+        </p:nvSpPr>
+        <p:spPr/>
+      </p:sp>
+      <p:sp>
+        <p:nvSpPr>
+          <p:cNvPr id="3" name="Notes Placeholder 2"/>
+          <p:cNvSpPr>
+            <a:spLocks noGrp="1"/>
+          </p:cNvSpPr>
+          <p:nvPr>
+            <p:ph type="body" sz="quarter" idx="3"/>
+          </p:nvPr>
+        </p:nvSpPr>
+        <p:spPr/>
+        <p:txBody>
+          <a:bodyPr/>
+          <a:lstStyle/>
+          <a:p>
+            <a:r>
+              <a:t>Alright, so let's talk about WHY we need RAG in the first place.</a:t>
+            </a:r>
+          </a:p>
+          <a:p>
+            <a:endParaRPr/>
+          </a:p>
+          <a:p>
+            <a:r>
+              <a:t>🗣️ [ASK]: "If I go to ChatGPT right now and ask 'How many paid leaves does our company give?' — what will happen?"</a:t>
+            </a:r>
+          </a:p>
+          <a:p>
+            <a:endParaRPr/>
+          </a:p>
+          <a:p>
+            <a:r>
+              <a:t>Exactly — it will either make up an answer (which is called a "hallucination"), OR it'll say "I don't have access to your company's data."</a:t>
+            </a:r>
+          </a:p>
+          <a:p>
+            <a:endParaRPr/>
+          </a:p>
+          <a:p>
+            <a:r>
+              <a:t>So there are 3 big problems here:</a:t>
+            </a:r>
+          </a:p>
+          <a:p>
+            <a:endParaRPr/>
+          </a:p>
+          <a:p>
+            <a:r>
+              <a:t>1️⃣ NO ACCESS TO PRIVATE DATA — ChatGPT was trained on internet data. It has NEVER read your company's HR policy, your Jira tickets, or your internal Wiki. It literally doesn't know.</a:t>
+            </a:r>
+          </a:p>
+          <a:p>
+            <a:endParaRPr/>
+          </a:p>
+          <a:p>
+            <a:r>
+              <a:t>2️⃣ TRAINING IS EXPENSIVE — "But can't we just train our own model?" Sure! That costs tens of thousands of dollars, takes weeks, and needs a dedicated ML team. Not practical for most companies.</a:t>
+            </a:r>
+          </a:p>
+          <a:p>
+            <a:endParaRPr/>
+          </a:p>
+          <a:p>
+            <a:r>
+              <a:t>3️⃣ HALLUCINATIONS — This is the scary one. Without real data to ground its answers, the AI will CONFIDENTLY make up answers. Imagine it telling an employee "You get 30 leaves" when the policy says 20. That's dangerous.</a:t>
+            </a:r>
+          </a:p>
+          <a:p>
+            <a:endParaRPr/>
+          </a:p>
+          <a:p>
+            <a:r>
+              <a:t>So what's the solution?</a:t>
+            </a:r>
+          </a:p>
+          <a:p>
+            <a:endParaRPr/>
+          </a:p>
+          <a:p>
+            <a:r>
+              <a:t>👉 RAG — Retrieval-Augmented Generation.</a:t>
+            </a:r>
+          </a:p>
+          <a:p>
+            <a:endParaRPr/>
+          </a:p>
+          <a:p>
+            <a:r>
+              <a:t>Think of it like this — instead of training the AI on all your data (expensive), we treat the AI like a student taking an OPEN BOOK EXAM.</a:t>
+            </a:r>
+          </a:p>
+          <a:p>
+            <a:endParaRPr/>
+          </a:p>
+          <a:p>
+            <a:r>
+              <a:t>🗣️ [ASK]: "In an open book exam, does the student need to memorize everything?"</a:t>
+            </a:r>
+          </a:p>
+          <a:p>
+            <a:endParaRPr/>
+          </a:p>
+          <a:p>
+            <a:r>
+              <a:t>No! They search the book, find the relevant page, and write their answer based on that page. That's EXACTLY what RAG does.</a:t>
+            </a:r>
+          </a:p>
+          <a:p>
+            <a:endParaRPr/>
+          </a:p>
+          <a:p>
+            <a:r>
+              <a:t>We search a database, grab the relevant paragraphs, hand them to the AI, and say: "Answer using ONLY these paragraphs." Simple and powerful.</a:t>
+            </a:r>
+          </a:p>
+        </p:txBody>
+      </p:sp>
+      <p:sp>
+        <p:nvSpPr>
+          <p:cNvPr id="4" name="Slide Number Placeholder 3"/>
+          <p:cNvSpPr>
+            <a:spLocks noGrp="1"/>
+          </p:cNvSpPr>
+          <p:nvPr>
+            <p:ph type="sldNum" sz="quarter" idx="5"/>
+          </p:nvPr>
+        </p:nvSpPr>
+        <p:spPr/>
+      </p:sp>
+    </p:spTree>
+  </p:cSld>
+  <p:clrMapOvr>
+    <a:masterClrMapping/>
+  </p:clrMapOvr>
+</p:notes>
+</file>
+
+<file path=ppt/notesSlides/notesSlide3.xml><?xml version="1.0" encoding="utf-8"?>
+<p:notes xmlns:a="http://schemas.openxmlformats.org/drawingml/2006/main" xmlns:r="http://schemas.openxmlformats.org/officeDocument/2006/relationships" xmlns:p="http://schemas.openxmlformats.org/presentationml/2006/main">
+  <p:cSld>
+    <p:spTree>
+      <p:nvGrpSpPr>
+        <p:cNvPr id="1" name=""/>
+        <p:cNvGrpSpPr/>
+        <p:nvPr/>
+      </p:nvGrpSpPr>
+      <p:grpSpPr>
+        <a:xfrm>
+          <a:off x="0" y="0"/>
+          <a:ext cx="0" cy="0"/>
+          <a:chOff x="0" y="0"/>
+          <a:chExt cx="0" cy="0"/>
+        </a:xfrm>
+      </p:grpSpPr>
+      <p:sp>
+        <p:nvSpPr>
+          <p:cNvPr id="2" name="Slide Image Placeholder 1"/>
+          <p:cNvSpPr>
+            <a:spLocks noGrp="1" noRot="1" noChangeAspect="1"/>
+          </p:cNvSpPr>
+          <p:nvPr>
+            <p:ph type="sldImg" idx="2"/>
+          </p:nvPr>
+        </p:nvSpPr>
+        <p:spPr/>
+      </p:sp>
+      <p:sp>
+        <p:nvSpPr>
+          <p:cNvPr id="3" name="Notes Placeholder 2"/>
+          <p:cNvSpPr>
+            <a:spLocks noGrp="1"/>
+          </p:cNvSpPr>
+          <p:nvPr>
+            <p:ph type="body" sz="quarter" idx="3"/>
+          </p:nvPr>
+        </p:nvSpPr>
+        <p:spPr/>
+        <p:txBody>
+          <a:bodyPr/>
+          <a:lstStyle/>
+          <a:p>
+            <a:r>
+              <a:t>Let's break down what R-A-G actually means. There are 3 steps:</a:t>
+            </a:r>
+          </a:p>
+          <a:p>
+            <a:endParaRPr/>
+          </a:p>
+          <a:p>
+            <a:r>
+              <a:t>R — RETRIEVAL</a:t>
+            </a:r>
+          </a:p>
+          <a:p>
+            <a:r>
+              <a:t>This is where we search our vector database. We have, say, 1 lakh chunks of text stored. When a user asks a question, we don't send ALL 1 lakh chunks to the AI — that would be slow and expensive. Instead, we SEARCH for just the top 3 most relevant chunks.</a:t>
+            </a:r>
+          </a:p>
+          <a:p>
+            <a:endParaRPr/>
+          </a:p>
+          <a:p>
+            <a:r>
+              <a:t>🗣️ [ASK]: "Why just 3? Why not all of them?"</a:t>
+            </a:r>
+          </a:p>
+          <a:p>
+            <a:r>
+              <a:t>Because LLMs have a limited context window — they can only read so much text at once. Plus, sending less = faster + cheaper.</a:t>
+            </a:r>
+          </a:p>
+          <a:p>
+            <a:endParaRPr/>
+          </a:p>
+          <a:p>
+            <a:r>
+              <a:t>A — AUGMENTED</a:t>
+            </a:r>
+          </a:p>
+          <a:p>
+            <a:r>
+              <a:t>Now we take those 3 chunks and INJECT them into the prompt. We literally paste them above the user's question and say "Here's your context." This is the "augmentation" — we're augmenting the prompt with real data.</a:t>
+            </a:r>
+          </a:p>
+          <a:p>
+            <a:endParaRPr/>
+          </a:p>
+          <a:p>
+            <a:r>
+              <a:t>G — GENERATION</a:t>
+            </a:r>
+          </a:p>
+          <a:p>
+            <a:r>
+              <a:t>Finally, the LLM reads the context + question and GENERATES an answer. But now it's grounded in real data, not guessing.</a:t>
+            </a:r>
+          </a:p>
+          <a:p>
+            <a:endParaRPr/>
+          </a:p>
+          <a:p>
+            <a:r>
+              <a:t>The key insight here — and I want you to remember this:</a:t>
+            </a:r>
+          </a:p>
+          <a:p>
+            <a:endParaRPr/>
+          </a:p>
+          <a:p>
+            <a:r>
+              <a:t>"Search 1 lakh chunks. Retrieve 3. Generate with 3."</a:t>
+            </a:r>
+          </a:p>
+          <a:p>
+            <a:endParaRPr/>
+          </a:p>
+          <a:p>
+            <a:r>
+              <a:t>No matter how much data you have — 10 documents or 10 million — the AI only ever reads a tiny handful of highly relevant text. That's what makes RAG scalable.</a:t>
+            </a:r>
+          </a:p>
+        </p:txBody>
+      </p:sp>
+      <p:sp>
+        <p:nvSpPr>
+          <p:cNvPr id="4" name="Slide Number Placeholder 3"/>
+          <p:cNvSpPr>
+            <a:spLocks noGrp="1"/>
+          </p:cNvSpPr>
+          <p:nvPr>
+            <p:ph type="sldNum" sz="quarter" idx="5"/>
+          </p:nvPr>
+        </p:nvSpPr>
+        <p:spPr/>
+      </p:sp>
+    </p:spTree>
+  </p:cSld>
+  <p:clrMapOvr>
+    <a:masterClrMapping/>
+  </p:clrMapOvr>
+</p:notes>
+</file>
+
+<file path=ppt/notesSlides/notesSlide4.xml><?xml version="1.0" encoding="utf-8"?>
+<p:notes xmlns:a="http://schemas.openxmlformats.org/drawingml/2006/main" xmlns:r="http://schemas.openxmlformats.org/officeDocument/2006/relationships" xmlns:p="http://schemas.openxmlformats.org/presentationml/2006/main">
+  <p:cSld>
+    <p:spTree>
+      <p:nvGrpSpPr>
+        <p:cNvPr id="1" name=""/>
+        <p:cNvGrpSpPr/>
+        <p:nvPr/>
+      </p:nvGrpSpPr>
+      <p:grpSpPr>
+        <a:xfrm>
+          <a:off x="0" y="0"/>
+          <a:ext cx="0" cy="0"/>
+          <a:chOff x="0" y="0"/>
+          <a:chExt cx="0" cy="0"/>
+        </a:xfrm>
+      </p:grpSpPr>
+      <p:sp>
+        <p:nvSpPr>
+          <p:cNvPr id="2" name="Slide Image Placeholder 1"/>
+          <p:cNvSpPr>
+            <a:spLocks noGrp="1" noRot="1" noChangeAspect="1"/>
+          </p:cNvSpPr>
+          <p:nvPr>
+            <p:ph type="sldImg" idx="2"/>
+          </p:nvPr>
+        </p:nvSpPr>
+        <p:spPr/>
+      </p:sp>
+      <p:sp>
+        <p:nvSpPr>
+          <p:cNvPr id="3" name="Notes Placeholder 2"/>
+          <p:cNvSpPr>
+            <a:spLocks noGrp="1"/>
+          </p:cNvSpPr>
+          <p:nvPr>
+            <p:ph type="body" sz="quarter" idx="3"/>
+          </p:nvPr>
+        </p:nvSpPr>
+        <p:spPr/>
+        <p:txBody>
+          <a:bodyPr/>
+          <a:lstStyle/>
+          <a:p>
+            <a:r>
+              <a:rPr dirty="0"/>
+              <a:t>Now let's look at HOW this actually works in code. There are two pipelines — the first one is Ingestion.</a:t>
+            </a:r>
+          </a:p>
+          <a:p>
+            <a:endParaRPr dirty="0"/>
+          </a:p>
+          <a:p>
+            <a:r>
+              <a:rPr dirty="0"/>
+              <a:t>Ingestion means: "Getting your documents ready for search."</a:t>
+            </a:r>
+          </a:p>
+          <a:p>
+            <a:endParaRPr dirty="0"/>
+          </a:p>
+          <a:p>
+            <a:r>
+              <a:rPr lang="en-IN" sz="1200" b="0" i="0" kern="1200" dirty="0">
+                <a:solidFill>
+                  <a:schemeClr val="tx1"/>
+                </a:solidFill>
+                <a:effectLst/>
+                <a:latin typeface="+mn-lt"/>
+                <a:ea typeface="+mn-ea"/>
+                <a:cs typeface="+mn-cs"/>
+              </a:rPr>
+              <a:t>Think of it like Google. Before you can Google something, Google first has to CRAWL and INDEX millions of web pages. That crawling + indexing part? That's what ingestion is. We're preparing our documents so they're searchable.</a:t>
+            </a:r>
+            <a:endParaRPr dirty="0"/>
+          </a:p>
+          <a:p>
+            <a:r>
+              <a:rPr dirty="0"/>
+              <a:t>There are 3 steps:</a:t>
+            </a:r>
+          </a:p>
+          <a:p>
+            <a:endParaRPr dirty="0"/>
+          </a:p>
+          <a:p>
+            <a:r>
+              <a:rPr dirty="0"/>
+              <a:t>STEP 1 — CHUNKING (Python does this)</a:t>
+            </a:r>
+          </a:p>
+          <a:p>
+            <a:r>
+              <a:rPr dirty="0"/>
+              <a:t>We take raw text — like an HR policy document — and split it into smaller pieces. In our demo, we split by newlines (paragraphs).</a:t>
+            </a:r>
+          </a:p>
+          <a:p>
+            <a:endParaRPr dirty="0"/>
+          </a:p>
+          <a:p>
+            <a:r>
+              <a:rPr dirty="0"/>
+              <a:t>🗣️ [ASK]: "Why do we split? Why not store the entire document as one big blob?"</a:t>
+            </a:r>
+          </a:p>
+          <a:p>
+            <a:r>
+              <a:rPr dirty="0"/>
+              <a:t>Because if you store a 50-page document as one chunk, and the user asks about leave policy, you'd retrieve ALL 50 pages. The AI would have to read through everything to find the answer. That's wasteful and slow. Smaller chunks = more precise retrieval.</a:t>
+            </a:r>
+          </a:p>
+          <a:p>
+            <a:endParaRPr dirty="0"/>
+          </a:p>
+          <a:p>
+            <a:r>
+              <a:rPr dirty="0"/>
+              <a:t>STEP 2 — EMBEDDING (OpenAI does this)</a:t>
+            </a:r>
+          </a:p>
+          <a:p>
+            <a:r>
+              <a:rPr dirty="0"/>
+              <a:t>Each chunk gets sent to OpenAI's embedding API. It comes back as a list of 1,536 numbers — a "vector." I'll explain vectors in detail in a later slide, but for now, just think of it as "converting text to math."</a:t>
+            </a:r>
+          </a:p>
+          <a:p>
+            <a:endParaRPr dirty="0"/>
+          </a:p>
+          <a:p>
+            <a:r>
+              <a:rPr dirty="0"/>
+              <a:t>STEP 3 — STORING (</a:t>
+            </a:r>
+            <a:r>
+              <a:rPr dirty="0" err="1"/>
+              <a:t>ChromaDB</a:t>
+            </a:r>
+            <a:r>
+              <a:rPr dirty="0"/>
+              <a:t> does this)</a:t>
+            </a:r>
+          </a:p>
+          <a:p>
+            <a:r>
+              <a:rPr dirty="0"/>
+              <a:t>We store both the original text AND its vector side by side in </a:t>
+            </a:r>
+            <a:r>
+              <a:rPr dirty="0" err="1"/>
+              <a:t>ChromaDB</a:t>
+            </a:r>
+            <a:r>
+              <a:rPr dirty="0"/>
+              <a:t>. So later, when someone searches, </a:t>
+            </a:r>
+            <a:r>
+              <a:rPr dirty="0" err="1"/>
+              <a:t>ChromaDB</a:t>
+            </a:r>
+            <a:r>
+              <a:rPr dirty="0"/>
+              <a:t> can compare vectors to find matches.</a:t>
+            </a:r>
+          </a:p>
+          <a:p>
+            <a:endParaRPr dirty="0"/>
+          </a:p>
+          <a:p>
+            <a:r>
+              <a:rPr dirty="0"/>
+              <a:t>Look at the code on the right — it's literally just a for loop:</a:t>
+            </a:r>
+          </a:p>
+          <a:p>
+            <a:r>
+              <a:rPr dirty="0"/>
+              <a:t>- For each document chunk, call </a:t>
+            </a:r>
+            <a:r>
+              <a:rPr dirty="0" err="1"/>
+              <a:t>get_embedding</a:t>
+            </a:r>
+            <a:r>
+              <a:rPr dirty="0"/>
+              <a:t>() to get the vector</a:t>
+            </a:r>
+          </a:p>
+          <a:p>
+            <a:r>
+              <a:rPr dirty="0"/>
+              <a:t>- Then call </a:t>
+            </a:r>
+            <a:r>
+              <a:rPr dirty="0" err="1"/>
+              <a:t>collection.add</a:t>
+            </a:r>
+            <a:r>
+              <a:rPr dirty="0"/>
+              <a:t>() to store it in </a:t>
+            </a:r>
+            <a:r>
+              <a:rPr dirty="0" err="1"/>
+              <a:t>ChromaDB</a:t>
+            </a:r>
+            <a:endParaRPr dirty="0"/>
+          </a:p>
+          <a:p>
+            <a:r>
+              <a:rPr dirty="0"/>
+              <a:t>- That's it! Three lines of meaningful code.</a:t>
+            </a:r>
+          </a:p>
+          <a:p>
+            <a:endParaRPr dirty="0"/>
+          </a:p>
+          <a:p>
+            <a:r>
+              <a:rPr dirty="0"/>
+              <a:t>The flow at the bottom summarizes it:</a:t>
+            </a:r>
+          </a:p>
+          <a:p>
+            <a:r>
+              <a:rPr dirty="0"/>
+              <a:t>📄 Raw Text → ✂️ Chunks → 🧠 Vectors → 💾 </a:t>
+            </a:r>
+            <a:r>
+              <a:rPr dirty="0" err="1"/>
+              <a:t>ChromaDB</a:t>
+            </a:r>
+            <a:endParaRPr dirty="0"/>
+          </a:p>
+        </p:txBody>
+      </p:sp>
+      <p:sp>
+        <p:nvSpPr>
+          <p:cNvPr id="4" name="Slide Number Placeholder 3"/>
+          <p:cNvSpPr>
+            <a:spLocks noGrp="1"/>
+          </p:cNvSpPr>
+          <p:nvPr>
+            <p:ph type="sldNum" sz="quarter" idx="5"/>
+          </p:nvPr>
+        </p:nvSpPr>
+        <p:spPr/>
+      </p:sp>
+    </p:spTree>
+  </p:cSld>
+  <p:clrMapOvr>
+    <a:masterClrMapping/>
+  </p:clrMapOvr>
+</p:notes>
+</file>
+
+<file path=ppt/notesSlides/notesSlide5.xml><?xml version="1.0" encoding="utf-8"?>
+<p:notes xmlns:a="http://schemas.openxmlformats.org/drawingml/2006/main" xmlns:r="http://schemas.openxmlformats.org/officeDocument/2006/relationships" xmlns:p="http://schemas.openxmlformats.org/presentationml/2006/main">
+  <p:cSld>
+    <p:spTree>
+      <p:nvGrpSpPr>
+        <p:cNvPr id="1" name=""/>
+        <p:cNvGrpSpPr/>
+        <p:nvPr/>
+      </p:nvGrpSpPr>
+      <p:grpSpPr>
+        <a:xfrm>
+          <a:off x="0" y="0"/>
+          <a:ext cx="0" cy="0"/>
+          <a:chOff x="0" y="0"/>
+          <a:chExt cx="0" cy="0"/>
+        </a:xfrm>
+      </p:grpSpPr>
+      <p:sp>
+        <p:nvSpPr>
+          <p:cNvPr id="2" name="Slide Image Placeholder 1"/>
+          <p:cNvSpPr>
+            <a:spLocks noGrp="1" noRot="1" noChangeAspect="1"/>
+          </p:cNvSpPr>
+          <p:nvPr>
+            <p:ph type="sldImg" idx="2"/>
+          </p:nvPr>
+        </p:nvSpPr>
+        <p:spPr/>
+      </p:sp>
+      <p:sp>
+        <p:nvSpPr>
+          <p:cNvPr id="3" name="Notes Placeholder 2"/>
+          <p:cNvSpPr>
+            <a:spLocks noGrp="1"/>
+          </p:cNvSpPr>
+          <p:nvPr>
+            <p:ph type="body" sz="quarter" idx="3"/>
+          </p:nvPr>
+        </p:nvSpPr>
+        <p:spPr/>
+        <p:txBody>
+          <a:bodyPr/>
+          <a:lstStyle/>
+          <a:p>
+            <a:r>
+              <a:rPr dirty="0"/>
+              <a:t>Pipeline 2 is where the magic happens — this is the actual RAG pipeline that runs when a user asks a question.</a:t>
+            </a:r>
+          </a:p>
+          <a:p>
+            <a:endParaRPr dirty="0"/>
+          </a:p>
+          <a:p>
+            <a:r>
+              <a:rPr dirty="0"/>
+              <a:t>Let me walk through the 4 steps:</a:t>
+            </a:r>
+          </a:p>
+          <a:p>
+            <a:endParaRPr dirty="0"/>
+          </a:p>
+          <a:p>
+            <a:r>
+              <a:rPr dirty="0"/>
+              <a:t>STEP 1 — EMBED THE QUERY</a:t>
+            </a:r>
+          </a:p>
+          <a:p>
+            <a:r>
+              <a:rPr dirty="0"/>
+              <a:t>When a user types "How many leaves do I get?", we FIRST convert that question into a vector — the same way we converted document chunks. Why? Because we need to compare apples to apples. The question needs to be in the same "math language" as our stored chunks.</a:t>
+            </a:r>
+          </a:p>
+          <a:p>
+            <a:endParaRPr dirty="0"/>
+          </a:p>
+          <a:p>
+            <a:r>
+              <a:rPr dirty="0"/>
+              <a:t>STEP 2 — RETRIEVE (The "R" in RAG)</a:t>
+            </a:r>
+          </a:p>
+          <a:p>
+            <a:r>
+              <a:rPr dirty="0"/>
+              <a:t>Now </a:t>
+            </a:r>
+            <a:r>
+              <a:rPr dirty="0" err="1"/>
+              <a:t>ChromaDB</a:t>
+            </a:r>
+            <a:r>
+              <a:rPr dirty="0"/>
+              <a:t> takes the question vector and compares it against ALL stored vectors using cosine similarity. It returns the Top 3 closest matches.</a:t>
+            </a:r>
+          </a:p>
+          <a:p>
+            <a:endParaRPr dirty="0"/>
+          </a:p>
+          <a:p>
+            <a:r>
+              <a:rPr dirty="0"/>
+              <a:t>🗣️ [ASK]: "What does 'closest' mean here?"</a:t>
+            </a:r>
+          </a:p>
+          <a:p>
+            <a:r>
+              <a:rPr dirty="0"/>
+              <a:t>It means the chunks whose meaning is most similar to the question. Not keyword matching — MEANING matching. "How many holidays?" and "Leave entitlement" would match even though they share zero words.</a:t>
+            </a:r>
+          </a:p>
+          <a:p>
+            <a:endParaRPr dirty="0"/>
+          </a:p>
+          <a:p>
+            <a:r>
+              <a:rPr dirty="0"/>
+              <a:t>STEP 3 — AUGMENT (The "A" in RAG)</a:t>
+            </a:r>
+          </a:p>
+          <a:p>
+            <a:r>
+              <a:rPr dirty="0"/>
+              <a:t>We take those 3 retrieved chunks and glue them into the prompt as "Context." The prompt literally looks like:</a:t>
+            </a:r>
+          </a:p>
+          <a:p>
+            <a:endParaRPr dirty="0"/>
+          </a:p>
+          <a:p>
+            <a:r>
+              <a:rPr dirty="0"/>
+              <a:t>"Answer the question using the context below:</a:t>
+            </a:r>
+          </a:p>
+          <a:p>
+            <a:r>
+              <a:rPr dirty="0"/>
+              <a:t>Context: [chunk 1, chunk 2, chunk 3]</a:t>
+            </a:r>
+          </a:p>
+          <a:p>
+            <a:r>
+              <a:rPr dirty="0"/>
+              <a:t>Question: How many leaves do I get?"</a:t>
+            </a:r>
+          </a:p>
+          <a:p>
+            <a:endParaRPr dirty="0"/>
+          </a:p>
+          <a:p>
+            <a:r>
+              <a:rPr dirty="0"/>
+              <a:t>STEP 4 — GENERATE (The "G" in RAG)</a:t>
+            </a:r>
+          </a:p>
+          <a:p>
+            <a:r>
+              <a:rPr dirty="0"/>
+              <a:t>We send this augmented prompt to GPT-4o-mini. The LLM reads the context, finds the answer, and writes a response. Because it has real data in front of it, it won't hallucinate.</a:t>
+            </a:r>
+          </a:p>
+          <a:p>
+            <a:endParaRPr dirty="0"/>
+          </a:p>
+          <a:p>
+            <a:r>
+              <a:rPr dirty="0"/>
+              <a:t>Look at the code on the right — it maps 1:1 to these 4 steps. That's the beauty of RAG — it's conceptually simple.</a:t>
+            </a:r>
+          </a:p>
+        </p:txBody>
+      </p:sp>
+      <p:sp>
+        <p:nvSpPr>
+          <p:cNvPr id="4" name="Slide Number Placeholder 3"/>
+          <p:cNvSpPr>
+            <a:spLocks noGrp="1"/>
+          </p:cNvSpPr>
+          <p:nvPr>
+            <p:ph type="sldNum" sz="quarter" idx="5"/>
+          </p:nvPr>
+        </p:nvSpPr>
+        <p:spPr/>
+      </p:sp>
+    </p:spTree>
+  </p:cSld>
+  <p:clrMapOvr>
+    <a:masterClrMapping/>
+  </p:clrMapOvr>
+</p:notes>
+</file>
+
+<file path=ppt/notesSlides/notesSlide6.xml><?xml version="1.0" encoding="utf-8"?>
+<p:notes xmlns:a="http://schemas.openxmlformats.org/drawingml/2006/main" xmlns:r="http://schemas.openxmlformats.org/officeDocument/2006/relationships" xmlns:p="http://schemas.openxmlformats.org/presentationml/2006/main">
+  <p:cSld>
+    <p:spTree>
+      <p:nvGrpSpPr>
+        <p:cNvPr id="1" name=""/>
+        <p:cNvGrpSpPr/>
+        <p:nvPr/>
+      </p:nvGrpSpPr>
+      <p:grpSpPr>
+        <a:xfrm>
+          <a:off x="0" y="0"/>
+          <a:ext cx="0" cy="0"/>
+          <a:chOff x="0" y="0"/>
+          <a:chExt cx="0" cy="0"/>
+        </a:xfrm>
+      </p:grpSpPr>
+      <p:sp>
+        <p:nvSpPr>
+          <p:cNvPr id="2" name="Slide Image Placeholder 1"/>
+          <p:cNvSpPr>
+            <a:spLocks noGrp="1" noRot="1" noChangeAspect="1"/>
+          </p:cNvSpPr>
+          <p:nvPr>
+            <p:ph type="sldImg" idx="2"/>
+          </p:nvPr>
+        </p:nvSpPr>
+        <p:spPr/>
+      </p:sp>
+      <p:sp>
+        <p:nvSpPr>
+          <p:cNvPr id="3" name="Notes Placeholder 2"/>
+          <p:cNvSpPr>
+            <a:spLocks noGrp="1"/>
+          </p:cNvSpPr>
+          <p:nvPr>
+            <p:ph type="body" sz="quarter" idx="3"/>
+          </p:nvPr>
+        </p:nvSpPr>
+        <p:spPr/>
+        <p:txBody>
+          <a:bodyPr/>
+          <a:lstStyle/>
+          <a:p>
+            <a:r>
+              <a:rPr dirty="0"/>
+              <a:t>Let's dig deeper into embeddings because this is the core concept that makes RAG work.</a:t>
+            </a:r>
+          </a:p>
+          <a:p>
+            <a:endParaRPr dirty="0"/>
+          </a:p>
+          <a:p>
+            <a:r>
+              <a:rPr dirty="0"/>
+              <a:t>🗣️ [ASK]: "How does a computer understand that 'How many holidays?' and 'Leave entitlement' mean the same thing? Computers only understand numbers, right?"</a:t>
+            </a:r>
+          </a:p>
+          <a:p>
+            <a:endParaRPr dirty="0"/>
+          </a:p>
+          <a:p>
+            <a:r>
+              <a:rPr dirty="0"/>
+              <a:t>That's exactly the point. An embedding is how we convert human language into numbers that computers can compare.</a:t>
+            </a:r>
+          </a:p>
+          <a:p>
+            <a:endParaRPr dirty="0"/>
+          </a:p>
+          <a:p>
+            <a:r>
+              <a:rPr dirty="0"/>
+              <a:t>When you call OpenAI's embedding API, it returns a list of 1,536 floating-point numbers. Each number captures some aspect of the text's MEANING — like topic, sentiment, formality, domain, etc.</a:t>
+            </a:r>
+          </a:p>
+          <a:p>
+            <a:endParaRPr dirty="0"/>
+          </a:p>
+          <a:p>
+            <a:r>
+              <a:rPr dirty="0"/>
+              <a:t>Here's the key insight:</a:t>
+            </a:r>
+          </a:p>
+          <a:p>
+            <a:endParaRPr dirty="0"/>
+          </a:p>
+          <a:p>
+            <a:r>
+              <a:rPr dirty="0"/>
+              <a:t>Sentences with SIMILAR MEANINGS produce SIMILAR VECTORS.</a:t>
+            </a:r>
+          </a:p>
+          <a:p>
+            <a:endParaRPr dirty="0"/>
+          </a:p>
+          <a:p>
+            <a:r>
+              <a:rPr dirty="0"/>
+              <a:t>Look at the example on the slide:</a:t>
+            </a:r>
+          </a:p>
+          <a:p>
+            <a:r>
+              <a:rPr dirty="0"/>
+              <a:t>- "Employees get 20 paid leaves" → [0.021, -0.153, 0.087, 0.042, ...]</a:t>
+            </a:r>
+          </a:p>
+          <a:p>
+            <a:r>
+              <a:rPr dirty="0"/>
+              <a:t>- "How many holidays do staff receive?" → [0.019, -0.148, 0.091, 0.039, ...]</a:t>
+            </a:r>
+          </a:p>
+          <a:p>
+            <a:endParaRPr dirty="0"/>
+          </a:p>
+          <a:p>
+            <a:r>
+              <a:rPr dirty="0"/>
+              <a:t>🗣️ [POINT TO NUMBERS]: "See how close these numbers are? 0.021 vs 0.019... -0.153 vs -0.148..."</a:t>
+            </a:r>
+          </a:p>
+          <a:p>
+            <a:endParaRPr dirty="0"/>
+          </a:p>
+          <a:p>
+            <a:r>
+              <a:rPr dirty="0"/>
+              <a:t>That's not a coincidence! The model learned that these sentences mean the same thing, so it mapped them to nearly the same point in 1,536-dimensional space.</a:t>
+            </a:r>
+          </a:p>
+          <a:p>
+            <a:endParaRPr dirty="0"/>
+          </a:p>
+          <a:p>
+            <a:r>
+              <a:rPr dirty="0"/>
+              <a:t>Now look at the code — it's literally 4 lines. Call the API, get the vector, return it. That's it.</a:t>
+            </a:r>
+          </a:p>
+          <a:p>
+            <a:endParaRPr dirty="0"/>
+          </a:p>
+          <a:p>
+            <a:r>
+              <a:rPr dirty="0" err="1"/>
+              <a:t>ChromaDB</a:t>
+            </a:r>
+            <a:r>
+              <a:rPr dirty="0"/>
+              <a:t> then uses COSINE SIMILARITY to compare vectors:</a:t>
+            </a:r>
+          </a:p>
+          <a:p>
+            <a:r>
+              <a:rPr dirty="0"/>
+              <a:t>- Score 0.98 = almost identical meaning ✅</a:t>
+            </a:r>
+          </a:p>
+          <a:p>
+            <a:r>
+              <a:rPr dirty="0"/>
+              <a:t>- Score 0.50 = somewhat related</a:t>
+            </a:r>
+          </a:p>
+          <a:p>
+            <a:r>
+              <a:rPr dirty="0"/>
+              <a:t>- Score 0.05 = completely unrelated ❌</a:t>
+            </a:r>
+          </a:p>
+          <a:p>
+            <a:endParaRPr dirty="0"/>
+          </a:p>
+          <a:p>
+            <a:r>
+              <a:rPr dirty="0"/>
+              <a:t>🗣️ [ASK]: "So when we say 'retrieve the top 3 chunks' — we mean the 3 chunks with the highest cosine similarity scores. Make sense?</a:t>
+            </a:r>
+          </a:p>
+        </p:txBody>
+      </p:sp>
+      <p:sp>
+        <p:nvSpPr>
+          <p:cNvPr id="4" name="Slide Number Placeholder 3"/>
+          <p:cNvSpPr>
+            <a:spLocks noGrp="1"/>
+          </p:cNvSpPr>
+          <p:nvPr>
+            <p:ph type="sldNum" sz="quarter" idx="5"/>
+          </p:nvPr>
+        </p:nvSpPr>
+        <p:spPr/>
+      </p:sp>
+    </p:spTree>
+  </p:cSld>
+  <p:clrMapOvr>
+    <a:masterClrMapping/>
+  </p:clrMapOvr>
+</p:notes>
+</file>
+
+<file path=ppt/notesSlides/notesSlide7.xml><?xml version="1.0" encoding="utf-8"?>
+<p:notes xmlns:a="http://schemas.openxmlformats.org/drawingml/2006/main" xmlns:r="http://schemas.openxmlformats.org/officeDocument/2006/relationships" xmlns:p="http://schemas.openxmlformats.org/presentationml/2006/main">
+  <p:cSld>
+    <p:spTree>
+      <p:nvGrpSpPr>
+        <p:cNvPr id="1" name=""/>
+        <p:cNvGrpSpPr/>
+        <p:nvPr/>
+      </p:nvGrpSpPr>
+      <p:grpSpPr>
+        <a:xfrm>
+          <a:off x="0" y="0"/>
+          <a:ext cx="0" cy="0"/>
+          <a:chOff x="0" y="0"/>
+          <a:chExt cx="0" cy="0"/>
+        </a:xfrm>
+      </p:grpSpPr>
+      <p:sp>
+        <p:nvSpPr>
+          <p:cNvPr id="2" name="Slide Image Placeholder 1"/>
+          <p:cNvSpPr>
+            <a:spLocks noGrp="1" noRot="1" noChangeAspect="1"/>
+          </p:cNvSpPr>
+          <p:nvPr>
+            <p:ph type="sldImg" idx="2"/>
+          </p:nvPr>
+        </p:nvSpPr>
+        <p:spPr/>
+      </p:sp>
+      <p:sp>
+        <p:nvSpPr>
+          <p:cNvPr id="3" name="Notes Placeholder 2"/>
+          <p:cNvSpPr>
+            <a:spLocks noGrp="1"/>
+          </p:cNvSpPr>
+          <p:nvPr>
+            <p:ph type="body" sz="quarter" idx="3"/>
+          </p:nvPr>
+        </p:nvSpPr>
+        <p:spPr/>
+        <p:txBody>
+          <a:bodyPr/>
+          <a:lstStyle/>
+          <a:p>
+            <a:r>
+              <a:rPr dirty="0"/>
+              <a:t>Let me give you a clear picture of who does what in our pipeline. There are 4 players:</a:t>
+            </a:r>
+          </a:p>
+          <a:p>
+            <a:endParaRPr dirty="0"/>
+          </a:p>
+          <a:p>
+            <a:r>
+              <a:rPr dirty="0"/>
+              <a:t>🐍 PYTHON — The Chopper</a:t>
+            </a:r>
+          </a:p>
+          <a:p>
+            <a:r>
+              <a:rPr dirty="0"/>
+              <a:t>Python's job is simple — split the raw text into smaller chunks. In our demo, we just split by newline. In production, you'd use something smarter (we'll talk about chunking strategies later).</a:t>
+            </a:r>
+          </a:p>
+          <a:p>
+            <a:endParaRPr dirty="0"/>
+          </a:p>
+          <a:p>
+            <a:r>
+              <a:rPr dirty="0"/>
+              <a:t>🧠 OPENAI EMBEDDINGS — The Translator</a:t>
+            </a:r>
+          </a:p>
+          <a:p>
+            <a:r>
+              <a:rPr dirty="0"/>
+              <a:t>OpenAI converts English text into math vectors. Think of it as a translator — it speaks both "human" and "math." We give it English, it gives us numbers.</a:t>
+            </a:r>
+          </a:p>
+          <a:p>
+            <a:endParaRPr dirty="0"/>
+          </a:p>
+          <a:p>
+            <a:r>
+              <a:rPr dirty="0"/>
+              <a:t>💾 CHROMADB — The Searcher</a:t>
+            </a:r>
+          </a:p>
+          <a:p>
+            <a:r>
+              <a:rPr dirty="0" err="1"/>
+              <a:t>ChromaDB</a:t>
+            </a:r>
+            <a:r>
+              <a:rPr dirty="0"/>
+              <a:t> is our vector database. It stores all the vectors and, when asked, searches through them to find the closest matches. Think of it like a librarian who knows exactly which shelf has the book you need.</a:t>
+            </a:r>
+          </a:p>
+          <a:p>
+            <a:endParaRPr dirty="0"/>
+          </a:p>
+          <a:p>
+            <a:r>
+              <a:rPr dirty="0"/>
+              <a:t>🗣️ [ASK]: "Does </a:t>
+            </a:r>
+            <a:r>
+              <a:rPr dirty="0" err="1"/>
+              <a:t>ChromaDB</a:t>
+            </a:r>
+            <a:r>
+              <a:rPr dirty="0"/>
+              <a:t> understand English?"</a:t>
+            </a:r>
+          </a:p>
+          <a:p>
+            <a:r>
+              <a:rPr dirty="0"/>
+              <a:t>No! It only understands vectors — numbers. It compares numbers to numbers. That's why we need the embedding step.</a:t>
+            </a:r>
+          </a:p>
+          <a:p>
+            <a:endParaRPr dirty="0"/>
+          </a:p>
+          <a:p>
+            <a:r>
+              <a:rPr dirty="0"/>
+              <a:t>🤖 OPENAI CHAT — The Writer</a:t>
+            </a:r>
+          </a:p>
+          <a:p>
+            <a:r>
+              <a:rPr dirty="0"/>
+              <a:t>Finally, GPT-4o-mini reads the retrieved context and writes the final answer. This is the only step that produces human-readable text.</a:t>
+            </a:r>
+          </a:p>
+          <a:p>
+            <a:endParaRPr dirty="0"/>
+          </a:p>
+          <a:p>
+            <a:r>
+              <a:rPr dirty="0"/>
+              <a:t>🗣️ [KEY POINT]: "Notice how each tool does ONE thing well. Python chops, OpenAI translates, </a:t>
+            </a:r>
+            <a:r>
+              <a:rPr dirty="0" err="1"/>
+              <a:t>ChromaDB</a:t>
+            </a:r>
+            <a:r>
+              <a:rPr dirty="0"/>
+              <a:t> searches, OpenAI Chat writes. That's good software design — single responsibility."</a:t>
+            </a:r>
+          </a:p>
+          <a:p>
+            <a:endParaRPr dirty="0"/>
+          </a:p>
+          <a:p>
+            <a:r>
+              <a:rPr dirty="0"/>
+              <a:t>Look at the code snippets under each card — they're tiny! Each tool's job is just 3-4 lines of code. The power comes from combining them.</a:t>
+            </a:r>
+          </a:p>
+        </p:txBody>
+      </p:sp>
+      <p:sp>
+        <p:nvSpPr>
+          <p:cNvPr id="4" name="Slide Number Placeholder 3"/>
+          <p:cNvSpPr>
+            <a:spLocks noGrp="1"/>
+          </p:cNvSpPr>
+          <p:nvPr>
+            <p:ph type="sldNum" sz="quarter" idx="5"/>
+          </p:nvPr>
+        </p:nvSpPr>
+        <p:spPr/>
+      </p:sp>
+    </p:spTree>
+  </p:cSld>
+  <p:clrMapOvr>
+    <a:masterClrMapping/>
+  </p:clrMapOvr>
+</p:notes>
+</file>
+
+<file path=ppt/notesSlides/notesSlide8.xml><?xml version="1.0" encoding="utf-8"?>
+<p:notes xmlns:a="http://schemas.openxmlformats.org/drawingml/2006/main" xmlns:r="http://schemas.openxmlformats.org/officeDocument/2006/relationships" xmlns:p="http://schemas.openxmlformats.org/presentationml/2006/main">
+  <p:cSld>
+    <p:spTree>
+      <p:nvGrpSpPr>
+        <p:cNvPr id="1" name=""/>
+        <p:cNvGrpSpPr/>
+        <p:nvPr/>
+      </p:nvGrpSpPr>
+      <p:grpSpPr>
+        <a:xfrm>
+          <a:off x="0" y="0"/>
+          <a:ext cx="0" cy="0"/>
+          <a:chOff x="0" y="0"/>
+          <a:chExt cx="0" cy="0"/>
+        </a:xfrm>
+      </p:grpSpPr>
+      <p:sp>
+        <p:nvSpPr>
+          <p:cNvPr id="2" name="Slide Image Placeholder 1"/>
+          <p:cNvSpPr>
+            <a:spLocks noGrp="1" noRot="1" noChangeAspect="1"/>
+          </p:cNvSpPr>
+          <p:nvPr>
+            <p:ph type="sldImg" idx="2"/>
+          </p:nvPr>
+        </p:nvSpPr>
+        <p:spPr/>
+      </p:sp>
+      <p:sp>
+        <p:nvSpPr>
+          <p:cNvPr id="3" name="Notes Placeholder 2"/>
+          <p:cNvSpPr>
+            <a:spLocks noGrp="1"/>
+          </p:cNvSpPr>
+          <p:nvPr>
+            <p:ph type="body" sz="quarter" idx="3"/>
+          </p:nvPr>
+        </p:nvSpPr>
+        <p:spPr/>
+        <p:txBody>
+          <a:bodyPr/>
+          <a:lstStyle/>
+          <a:p>
+            <a:r>
+              <a:t>Alright, let me give you the 5 key points I want you to walk away with:</a:t>
+            </a:r>
+          </a:p>
+          <a:p>
+            <a:endParaRPr/>
+          </a:p>
+          <a:p>
+            <a:r>
+              <a:t>1️⃣ RAG = OPEN BOOK EXAM FOR AI</a:t>
+            </a:r>
+          </a:p>
+          <a:p>
+            <a:r>
+              <a:t>Instead of fine-tuning a model (expensive, slow), we just search a database and give the AI the relevant pages. Simple, cheap, and effective.</a:t>
+            </a:r>
+          </a:p>
+          <a:p>
+            <a:endParaRPr/>
+          </a:p>
+          <a:p>
+            <a:r>
+              <a:t>2️⃣ THE LLM NEVER SEES ALL YOUR DATA</a:t>
+            </a:r>
+          </a:p>
+          <a:p>
+            <a:r>
+              <a:t>This is important for both performance AND security. ChromaDB narrows 1 lakh chunks down to just 3. The LLM reads only those 3. Your entire database is never exposed to the AI.</a:t>
+            </a:r>
+          </a:p>
+          <a:p>
+            <a:endParaRPr/>
+          </a:p>
+          <a:p>
+            <a:r>
+              <a:t>🗣️ [ASK]: "Why is this good for security?"</a:t>
+            </a:r>
+          </a:p>
+          <a:p>
+            <a:r>
+              <a:t>Because the LLM only sees what's relevant. It can't accidentally leak information from a document the user shouldn't have access to (if you add proper access controls).</a:t>
+            </a:r>
+          </a:p>
+          <a:p>
+            <a:endParaRPr/>
+          </a:p>
+          <a:p>
+            <a:r>
+              <a:t>3️⃣ THE PROMPT CONTROLS STRICTNESS</a:t>
+            </a:r>
+          </a:p>
+          <a:p>
+            <a:r>
+              <a:t>If you say "Answer ONLY from context" — the AI won't make stuff up. If you allow fallback, it'll use general knowledge when context doesn't help. You control this behavior.</a:t>
+            </a:r>
+          </a:p>
+          <a:p>
+            <a:endParaRPr/>
+          </a:p>
+          <a:p>
+            <a:r>
+              <a:t>4️⃣ EMBEDDINGS CAPTURE MEANING, NOT KEYWORDS</a:t>
+            </a:r>
+          </a:p>
+          <a:p>
+            <a:r>
+              <a:t>Traditional search uses keywords — if you search "holidays," it only finds documents with the word "holidays." Embedding search finds documents about LEAVE, PTO, TIME OFF, VACATION — all from searching "holidays." That's the superpower.</a:t>
+            </a:r>
+          </a:p>
+          <a:p>
+            <a:endParaRPr/>
+          </a:p>
+          <a:p>
+            <a:r>
+              <a:t>🗣️ [ASK]: "Can anyone think of a scenario where keyword search would fail but embedding search would succeed?"</a:t>
+            </a:r>
+          </a:p>
+          <a:p>
+            <a:r>
+              <a:t>(Let them brainstorm — good examples: different languages, synonyms, paraphrased questions)</a:t>
+            </a:r>
+          </a:p>
+          <a:p>
+            <a:endParaRPr/>
+          </a:p>
+          <a:p>
+            <a:r>
+              <a:t>5️⃣ UPDATES ARE INSTANT</a:t>
+            </a:r>
+          </a:p>
+          <a:p>
+            <a:r>
+              <a:t>Changed a policy? Just re-ingest the new document. No retraining needed. The pipeline picks it up immediately. This is a HUGE advantage over fine-tuned models.</a:t>
+            </a:r>
+          </a:p>
+        </p:txBody>
+      </p:sp>
+      <p:sp>
+        <p:nvSpPr>
+          <p:cNvPr id="4" name="Slide Number Placeholder 3"/>
+          <p:cNvSpPr>
+            <a:spLocks noGrp="1"/>
+          </p:cNvSpPr>
+          <p:nvPr>
+            <p:ph type="sldNum" sz="quarter" idx="5"/>
+          </p:nvPr>
+        </p:nvSpPr>
+        <p:spPr/>
+      </p:sp>
+    </p:spTree>
+  </p:cSld>
+  <p:clrMapOvr>
+    <a:masterClrMapping/>
+  </p:clrMapOvr>
+</p:notes>
+</file>
+
+<file path=ppt/notesSlides/notesSlide9.xml><?xml version="1.0" encoding="utf-8"?>
+<p:notes xmlns:a="http://schemas.openxmlformats.org/drawingml/2006/main" xmlns:r="http://schemas.openxmlformats.org/officeDocument/2006/relationships" xmlns:p="http://schemas.openxmlformats.org/presentationml/2006/main">
+  <p:cSld>
+    <p:spTree>
+      <p:nvGrpSpPr>
+        <p:cNvPr id="1" name=""/>
+        <p:cNvGrpSpPr/>
+        <p:nvPr/>
+      </p:nvGrpSpPr>
+      <p:grpSpPr>
+        <a:xfrm>
+          <a:off x="0" y="0"/>
+          <a:ext cx="0" cy="0"/>
+          <a:chOff x="0" y="0"/>
+          <a:chExt cx="0" cy="0"/>
+        </a:xfrm>
+      </p:grpSpPr>
+      <p:sp>
+        <p:nvSpPr>
+          <p:cNvPr id="2" name="Slide Image Placeholder 1"/>
+          <p:cNvSpPr>
+            <a:spLocks noGrp="1" noRot="1" noChangeAspect="1"/>
+          </p:cNvSpPr>
+          <p:nvPr>
+            <p:ph type="sldImg" idx="2"/>
+          </p:nvPr>
+        </p:nvSpPr>
+        <p:spPr/>
+      </p:sp>
+      <p:sp>
+        <p:nvSpPr>
+          <p:cNvPr id="3" name="Notes Placeholder 2"/>
+          <p:cNvSpPr>
+            <a:spLocks noGrp="1"/>
+          </p:cNvSpPr>
+          <p:nvPr>
+            <p:ph type="body" sz="quarter" idx="3"/>
+          </p:nvPr>
+        </p:nvSpPr>
+        <p:spPr/>
+        <p:txBody>
+          <a:bodyPr/>
+          <a:lstStyle/>
+          <a:p>
+            <a:r>
+              <a:t>Now let's go deeper into HOW a sentence becomes 1,536 numbers. This is the part that seems like magic, but it's actually a clear 4-step process.</a:t>
+            </a:r>
+          </a:p>
+          <a:p>
+            <a:endParaRPr/>
+          </a:p>
+          <a:p>
+            <a:r>
+              <a:t>STEP 1 — TOKENIZATION</a:t>
+            </a:r>
+          </a:p>
+          <a:p>
+            <a:r>
+              <a:t>The model doesn't read words like we do. It breaks text into "tokens" — which are word-pieces. For example:</a:t>
+            </a:r>
+          </a:p>
+          <a:p>
+            <a:r>
+              <a:t>"Employees" becomes ["Employ", "ees"]</a:t>
+            </a:r>
+          </a:p>
+          <a:p>
+            <a:endParaRPr/>
+          </a:p>
+          <a:p>
+            <a:r>
+              <a:t>🗣️ [ASK]: "Why not split by whole words?"</a:t>
+            </a:r>
+          </a:p>
+          <a:p>
+            <a:r>
+              <a:t>Because there are millions of possible words (including misspellings, technical terms, etc.). Tokens let the model handle ANY text with a fixed vocabulary of ~50,000 pieces.</a:t>
+            </a:r>
+          </a:p>
+          <a:p>
+            <a:endParaRPr/>
+          </a:p>
+          <a:p>
+            <a:r>
+              <a:t>STEP 2 — TRANSFORMER NEURAL NETWORK</a:t>
+            </a:r>
+          </a:p>
+          <a:p>
+            <a:r>
+              <a:t>These tokens pass through 12 transformer layers. This is where the MAGIC happens.</a:t>
+            </a:r>
+          </a:p>
+          <a:p>
+            <a:endParaRPr/>
+          </a:p>
+          <a:p>
+            <a:r>
+              <a:t>Each layer uses something called "self-attention" — it looks at how every token relates to every OTHER token in the sentence. For example, in "The bank by the river was flooded" — the word "bank" attends to "river" and "flooded," so the model knows it's a riverbank, NOT a financial bank.</a:t>
+            </a:r>
+          </a:p>
+          <a:p>
+            <a:endParaRPr/>
+          </a:p>
+          <a:p>
+            <a:r>
+              <a:t>🗣️ [KEY POINT]: "This is why embeddings understand CONTEXT, not just individual words."</a:t>
+            </a:r>
+          </a:p>
+          <a:p>
+            <a:endParaRPr/>
+          </a:p>
+          <a:p>
+            <a:r>
+              <a:t>STEP 3 — POOLING</a:t>
+            </a:r>
+          </a:p>
+          <a:p>
+            <a:r>
+              <a:t>After the transformer layers, each token has its own representation. But we need ONE vector for the whole sentence. So we AVERAGE all token representations into a single 1,536-dimensional vector.</a:t>
+            </a:r>
+          </a:p>
+          <a:p>
+            <a:endParaRPr/>
+          </a:p>
+          <a:p>
+            <a:r>
+              <a:t>STEP 4 — NORMALIZATION</a:t>
+            </a:r>
+          </a:p>
+          <a:p>
+            <a:r>
+              <a:t>The vector is scaled to have a length of 1. This is just a math trick so that cosine similarity works properly.</a:t>
+            </a:r>
+          </a:p>
+          <a:p>
+            <a:endParaRPr/>
+          </a:p>
+          <a:p>
+            <a:r>
+              <a:t>Now look at the right side — WHY 1,536 dimensions?</a:t>
+            </a:r>
+          </a:p>
+          <a:p>
+            <a:endParaRPr/>
+          </a:p>
+          <a:p>
+            <a:r>
+              <a:t>Think of it like a photograph:</a:t>
+            </a:r>
+          </a:p>
+          <a:p>
+            <a:r>
+              <a:t>- 50 dimensions = blurry thumbnail (can barely tell what it is)</a:t>
+            </a:r>
+          </a:p>
+          <a:p>
+            <a:r>
+              <a:t>- 384 dimensions = passport photo (recognizable but lacking detail)</a:t>
+            </a:r>
+          </a:p>
+          <a:p>
+            <a:r>
+              <a:t>- 1,536 dimensions = HD portrait (that's us! Great quality at reasonable cost)</a:t>
+            </a:r>
+          </a:p>
+          <a:p>
+            <a:r>
+              <a:t>- 3,072 dimensions = 4K ultra (overkill for most use cases, slower)</a:t>
+            </a:r>
+          </a:p>
+          <a:p>
+            <a:endParaRPr/>
+          </a:p>
+          <a:p>
+            <a:r>
+              <a:t>The table shows popular models and their sizes. We use text-embedding-3-small because it's the sweet spot of quality vs. speed and cost.</a:t>
+            </a:r>
+          </a:p>
+          <a:p>
+            <a:endParaRPr/>
+          </a:p>
+          <a:p>
+            <a:r>
+              <a:t>🗣️ [ASK]: "Any questions about this before we move on? This is the most technical slide, so no shame in asking.</a:t>
+            </a:r>
+          </a:p>
+        </p:txBody>
+      </p:sp>
+      <p:sp>
+        <p:nvSpPr>
+          <p:cNvPr id="4" name="Slide Number Placeholder 3"/>
+          <p:cNvSpPr>
+            <a:spLocks noGrp="1"/>
+          </p:cNvSpPr>
+          <p:nvPr>
+            <p:ph type="sldNum" sz="quarter" idx="5"/>
+          </p:nvPr>
+        </p:nvSpPr>
+        <p:spPr/>
+      </p:sp>
+    </p:spTree>
+  </p:cSld>
+  <p:clrMapOvr>
+    <a:masterClrMapping/>
+  </p:clrMapOvr>
+</p:notes>
 </file>
 
 <file path=ppt/slideLayouts/slideLayout1.xml><?xml version="1.0" encoding="utf-8"?>
@@ -153,10 +1942,9 @@
           <a:lstStyle/>
           <a:p>
             <a:r>
-              <a:rPr lang="en-US" smtClean="0"/>
+              <a:rPr lang="en-US"/>
               <a:t>Click to edit Master title style</a:t>
             </a:r>
-            <a:endParaRPr lang="en-US"/>
           </a:p>
         </p:txBody>
       </p:sp>
@@ -272,10 +2060,9 @@
           </a:lstStyle>
           <a:p>
             <a:r>
-              <a:rPr lang="en-US" smtClean="0"/>
+              <a:rPr lang="en-US"/>
               <a:t>Click to edit Master subtitle style</a:t>
             </a:r>
-            <a:endParaRPr lang="en-US"/>
           </a:p>
         </p:txBody>
       </p:sp>
@@ -296,7 +2083,7 @@
           <a:p>
             <a:fld id="{5BCAD085-E8A6-8845-BD4E-CB4CCA059FC4}" type="datetimeFigureOut">
               <a:rPr lang="en-US" smtClean="0"/>
-              <a:t>1/27/13</a:t>
+              <a:t>4/2/26</a:t>
             </a:fld>
             <a:endParaRPr lang="en-US"/>
           </a:p>
@@ -390,10 +2177,9 @@
           <a:lstStyle/>
           <a:p>
             <a:r>
-              <a:rPr lang="en-US" smtClean="0"/>
+              <a:rPr lang="en-US"/>
               <a:t>Click to edit Master title style</a:t>
             </a:r>
-            <a:endParaRPr lang="en-US"/>
           </a:p>
         </p:txBody>
       </p:sp>
@@ -414,38 +2200,37 @@
           <a:p>
             <a:pPr lvl="0"/>
             <a:r>
-              <a:rPr lang="en-US" smtClean="0"/>
+              <a:rPr lang="en-US"/>
               <a:t>Click to edit Master text styles</a:t>
             </a:r>
           </a:p>
           <a:p>
             <a:pPr lvl="1"/>
             <a:r>
-              <a:rPr lang="en-US" smtClean="0"/>
+              <a:rPr lang="en-US"/>
               <a:t>Second level</a:t>
             </a:r>
           </a:p>
           <a:p>
             <a:pPr lvl="2"/>
             <a:r>
-              <a:rPr lang="en-US" smtClean="0"/>
+              <a:rPr lang="en-US"/>
               <a:t>Third level</a:t>
             </a:r>
           </a:p>
           <a:p>
             <a:pPr lvl="3"/>
             <a:r>
-              <a:rPr lang="en-US" smtClean="0"/>
+              <a:rPr lang="en-US"/>
               <a:t>Fourth level</a:t>
             </a:r>
           </a:p>
           <a:p>
             <a:pPr lvl="4"/>
             <a:r>
-              <a:rPr lang="en-US" smtClean="0"/>
+              <a:rPr lang="en-US"/>
               <a:t>Fifth level</a:t>
             </a:r>
-            <a:endParaRPr lang="en-US"/>
           </a:p>
         </p:txBody>
       </p:sp>
@@ -466,7 +2251,7 @@
           <a:p>
             <a:fld id="{5BCAD085-E8A6-8845-BD4E-CB4CCA059FC4}" type="datetimeFigureOut">
               <a:rPr lang="en-US" smtClean="0"/>
-              <a:t>1/27/13</a:t>
+              <a:t>4/2/26</a:t>
             </a:fld>
             <a:endParaRPr lang="en-US"/>
           </a:p>
@@ -565,10 +2350,9 @@
           <a:lstStyle/>
           <a:p>
             <a:r>
-              <a:rPr lang="en-US" smtClean="0"/>
+              <a:rPr lang="en-US"/>
               <a:t>Click to edit Master title style</a:t>
             </a:r>
-            <a:endParaRPr lang="en-US"/>
           </a:p>
         </p:txBody>
       </p:sp>
@@ -594,38 +2378,37 @@
           <a:p>
             <a:pPr lvl="0"/>
             <a:r>
-              <a:rPr lang="en-US" smtClean="0"/>
+              <a:rPr lang="en-US"/>
               <a:t>Click to edit Master text styles</a:t>
             </a:r>
           </a:p>
           <a:p>
             <a:pPr lvl="1"/>
             <a:r>
-              <a:rPr lang="en-US" smtClean="0"/>
+              <a:rPr lang="en-US"/>
               <a:t>Second level</a:t>
             </a:r>
           </a:p>
           <a:p>
             <a:pPr lvl="2"/>
             <a:r>
-              <a:rPr lang="en-US" smtClean="0"/>
+              <a:rPr lang="en-US"/>
               <a:t>Third level</a:t>
             </a:r>
           </a:p>
           <a:p>
             <a:pPr lvl="3"/>
             <a:r>
-              <a:rPr lang="en-US" smtClean="0"/>
+              <a:rPr lang="en-US"/>
               <a:t>Fourth level</a:t>
             </a:r>
           </a:p>
           <a:p>
             <a:pPr lvl="4"/>
             <a:r>
-              <a:rPr lang="en-US" smtClean="0"/>
+              <a:rPr lang="en-US"/>
               <a:t>Fifth level</a:t>
             </a:r>
-            <a:endParaRPr lang="en-US"/>
           </a:p>
         </p:txBody>
       </p:sp>
@@ -646,7 +2429,7 @@
           <a:p>
             <a:fld id="{5BCAD085-E8A6-8845-BD4E-CB4CCA059FC4}" type="datetimeFigureOut">
               <a:rPr lang="en-US" smtClean="0"/>
-              <a:t>1/27/13</a:t>
+              <a:t>4/2/26</a:t>
             </a:fld>
             <a:endParaRPr lang="en-US"/>
           </a:p>
@@ -740,10 +2523,9 @@
           <a:lstStyle/>
           <a:p>
             <a:r>
-              <a:rPr lang="en-US" smtClean="0"/>
+              <a:rPr lang="en-US"/>
               <a:t>Click to edit Master title style</a:t>
             </a:r>
-            <a:endParaRPr lang="en-US"/>
           </a:p>
         </p:txBody>
       </p:sp>
@@ -764,38 +2546,37 @@
           <a:p>
             <a:pPr lvl="0"/>
             <a:r>
-              <a:rPr lang="en-US" smtClean="0"/>
+              <a:rPr lang="en-US"/>
               <a:t>Click to edit Master text styles</a:t>
             </a:r>
           </a:p>
           <a:p>
             <a:pPr lvl="1"/>
             <a:r>
-              <a:rPr lang="en-US" smtClean="0"/>
+              <a:rPr lang="en-US"/>
               <a:t>Second level</a:t>
             </a:r>
           </a:p>
           <a:p>
             <a:pPr lvl="2"/>
             <a:r>
-              <a:rPr lang="en-US" smtClean="0"/>
+              <a:rPr lang="en-US"/>
               <a:t>Third level</a:t>
             </a:r>
           </a:p>
           <a:p>
             <a:pPr lvl="3"/>
             <a:r>
-              <a:rPr lang="en-US" smtClean="0"/>
+              <a:rPr lang="en-US"/>
               <a:t>Fourth level</a:t>
             </a:r>
           </a:p>
           <a:p>
             <a:pPr lvl="4"/>
             <a:r>
-              <a:rPr lang="en-US" smtClean="0"/>
+              <a:rPr lang="en-US"/>
               <a:t>Fifth level</a:t>
             </a:r>
-            <a:endParaRPr lang="en-US"/>
           </a:p>
         </p:txBody>
       </p:sp>
@@ -816,7 +2597,7 @@
           <a:p>
             <a:fld id="{5BCAD085-E8A6-8845-BD4E-CB4CCA059FC4}" type="datetimeFigureOut">
               <a:rPr lang="en-US" smtClean="0"/>
-              <a:t>1/27/13</a:t>
+              <a:t>4/2/26</a:t>
             </a:fld>
             <a:endParaRPr lang="en-US"/>
           </a:p>
@@ -919,10 +2700,9 @@
           </a:lstStyle>
           <a:p>
             <a:r>
-              <a:rPr lang="en-US" smtClean="0"/>
+              <a:rPr lang="en-US"/>
               <a:t>Click to edit Master title style</a:t>
             </a:r>
-            <a:endParaRPr lang="en-US"/>
           </a:p>
         </p:txBody>
       </p:sp>
@@ -1039,7 +2819,7 @@
           <a:p>
             <a:pPr lvl="0"/>
             <a:r>
-              <a:rPr lang="en-US" smtClean="0"/>
+              <a:rPr lang="en-US"/>
               <a:t>Click to edit Master text styles</a:t>
             </a:r>
           </a:p>
@@ -1062,7 +2842,7 @@
           <a:p>
             <a:fld id="{5BCAD085-E8A6-8845-BD4E-CB4CCA059FC4}" type="datetimeFigureOut">
               <a:rPr lang="en-US" smtClean="0"/>
-              <a:t>1/27/13</a:t>
+              <a:t>4/2/26</a:t>
             </a:fld>
             <a:endParaRPr lang="en-US"/>
           </a:p>
@@ -1156,10 +2936,9 @@
           <a:lstStyle/>
           <a:p>
             <a:r>
-              <a:rPr lang="en-US" smtClean="0"/>
+              <a:rPr lang="en-US"/>
               <a:t>Click to edit Master title style</a:t>
             </a:r>
-            <a:endParaRPr lang="en-US"/>
           </a:p>
         </p:txBody>
       </p:sp>
@@ -1213,38 +2992,37 @@
           <a:p>
             <a:pPr lvl="0"/>
             <a:r>
-              <a:rPr lang="en-US" smtClean="0"/>
+              <a:rPr lang="en-US"/>
               <a:t>Click to edit Master text styles</a:t>
             </a:r>
           </a:p>
           <a:p>
             <a:pPr lvl="1"/>
             <a:r>
-              <a:rPr lang="en-US" smtClean="0"/>
+              <a:rPr lang="en-US"/>
               <a:t>Second level</a:t>
             </a:r>
           </a:p>
           <a:p>
             <a:pPr lvl="2"/>
             <a:r>
-              <a:rPr lang="en-US" smtClean="0"/>
+              <a:rPr lang="en-US"/>
               <a:t>Third level</a:t>
             </a:r>
           </a:p>
           <a:p>
             <a:pPr lvl="3"/>
             <a:r>
-              <a:rPr lang="en-US" smtClean="0"/>
+              <a:rPr lang="en-US"/>
               <a:t>Fourth level</a:t>
             </a:r>
           </a:p>
           <a:p>
             <a:pPr lvl="4"/>
             <a:r>
-              <a:rPr lang="en-US" smtClean="0"/>
+              <a:rPr lang="en-US"/>
               <a:t>Fifth level</a:t>
             </a:r>
-            <a:endParaRPr lang="en-US"/>
           </a:p>
         </p:txBody>
       </p:sp>
@@ -1298,38 +3076,37 @@
           <a:p>
             <a:pPr lvl="0"/>
             <a:r>
-              <a:rPr lang="en-US" smtClean="0"/>
+              <a:rPr lang="en-US"/>
               <a:t>Click to edit Master text styles</a:t>
             </a:r>
           </a:p>
           <a:p>
             <a:pPr lvl="1"/>
             <a:r>
-              <a:rPr lang="en-US" smtClean="0"/>
+              <a:rPr lang="en-US"/>
               <a:t>Second level</a:t>
             </a:r>
           </a:p>
           <a:p>
             <a:pPr lvl="2"/>
             <a:r>
-              <a:rPr lang="en-US" smtClean="0"/>
+              <a:rPr lang="en-US"/>
               <a:t>Third level</a:t>
             </a:r>
           </a:p>
           <a:p>
             <a:pPr lvl="3"/>
             <a:r>
-              <a:rPr lang="en-US" smtClean="0"/>
+              <a:rPr lang="en-US"/>
               <a:t>Fourth level</a:t>
             </a:r>
           </a:p>
           <a:p>
             <a:pPr lvl="4"/>
             <a:r>
-              <a:rPr lang="en-US" smtClean="0"/>
+              <a:rPr lang="en-US"/>
               <a:t>Fifth level</a:t>
             </a:r>
-            <a:endParaRPr lang="en-US"/>
           </a:p>
         </p:txBody>
       </p:sp>
@@ -1350,7 +3127,7 @@
           <a:p>
             <a:fld id="{5BCAD085-E8A6-8845-BD4E-CB4CCA059FC4}" type="datetimeFigureOut">
               <a:rPr lang="en-US" smtClean="0"/>
-              <a:t>1/27/13</a:t>
+              <a:t>4/2/26</a:t>
             </a:fld>
             <a:endParaRPr lang="en-US"/>
           </a:p>
@@ -1448,10 +3225,9 @@
           </a:lstStyle>
           <a:p>
             <a:r>
-              <a:rPr lang="en-US" smtClean="0"/>
+              <a:rPr lang="en-US"/>
               <a:t>Click to edit Master title style</a:t>
             </a:r>
-            <a:endParaRPr lang="en-US"/>
           </a:p>
         </p:txBody>
       </p:sp>
@@ -1514,7 +3290,7 @@
           <a:p>
             <a:pPr lvl="0"/>
             <a:r>
-              <a:rPr lang="en-US" smtClean="0"/>
+              <a:rPr lang="en-US"/>
               <a:t>Click to edit Master text styles</a:t>
             </a:r>
           </a:p>
@@ -1570,38 +3346,37 @@
           <a:p>
             <a:pPr lvl="0"/>
             <a:r>
-              <a:rPr lang="en-US" smtClean="0"/>
+              <a:rPr lang="en-US"/>
               <a:t>Click to edit Master text styles</a:t>
             </a:r>
           </a:p>
           <a:p>
             <a:pPr lvl="1"/>
             <a:r>
-              <a:rPr lang="en-US" smtClean="0"/>
+              <a:rPr lang="en-US"/>
               <a:t>Second level</a:t>
             </a:r>
           </a:p>
           <a:p>
             <a:pPr lvl="2"/>
             <a:r>
-              <a:rPr lang="en-US" smtClean="0"/>
+              <a:rPr lang="en-US"/>
               <a:t>Third level</a:t>
             </a:r>
           </a:p>
           <a:p>
             <a:pPr lvl="3"/>
             <a:r>
-              <a:rPr lang="en-US" smtClean="0"/>
+              <a:rPr lang="en-US"/>
               <a:t>Fourth level</a:t>
             </a:r>
           </a:p>
           <a:p>
             <a:pPr lvl="4"/>
             <a:r>
-              <a:rPr lang="en-US" smtClean="0"/>
+              <a:rPr lang="en-US"/>
               <a:t>Fifth level</a:t>
             </a:r>
-            <a:endParaRPr lang="en-US"/>
           </a:p>
         </p:txBody>
       </p:sp>
@@ -1664,7 +3439,7 @@
           <a:p>
             <a:pPr lvl="0"/>
             <a:r>
-              <a:rPr lang="en-US" smtClean="0"/>
+              <a:rPr lang="en-US"/>
               <a:t>Click to edit Master text styles</a:t>
             </a:r>
           </a:p>
@@ -1720,38 +3495,37 @@
           <a:p>
             <a:pPr lvl="0"/>
             <a:r>
-              <a:rPr lang="en-US" smtClean="0"/>
+              <a:rPr lang="en-US"/>
               <a:t>Click to edit Master text styles</a:t>
             </a:r>
           </a:p>
           <a:p>
             <a:pPr lvl="1"/>
             <a:r>
-              <a:rPr lang="en-US" smtClean="0"/>
+              <a:rPr lang="en-US"/>
               <a:t>Second level</a:t>
             </a:r>
           </a:p>
           <a:p>
             <a:pPr lvl="2"/>
             <a:r>
-              <a:rPr lang="en-US" smtClean="0"/>
+              <a:rPr lang="en-US"/>
               <a:t>Third level</a:t>
             </a:r>
           </a:p>
           <a:p>
             <a:pPr lvl="3"/>
             <a:r>
-              <a:rPr lang="en-US" smtClean="0"/>
+              <a:rPr lang="en-US"/>
               <a:t>Fourth level</a:t>
             </a:r>
           </a:p>
           <a:p>
             <a:pPr lvl="4"/>
             <a:r>
-              <a:rPr lang="en-US" smtClean="0"/>
+              <a:rPr lang="en-US"/>
               <a:t>Fifth level</a:t>
             </a:r>
-            <a:endParaRPr lang="en-US"/>
           </a:p>
         </p:txBody>
       </p:sp>
@@ -1772,7 +3546,7 @@
           <a:p>
             <a:fld id="{5BCAD085-E8A6-8845-BD4E-CB4CCA059FC4}" type="datetimeFigureOut">
               <a:rPr lang="en-US" smtClean="0"/>
-              <a:t>1/27/13</a:t>
+              <a:t>4/2/26</a:t>
             </a:fld>
             <a:endParaRPr lang="en-US"/>
           </a:p>
@@ -1866,10 +3640,9 @@
           <a:lstStyle/>
           <a:p>
             <a:r>
-              <a:rPr lang="en-US" smtClean="0"/>
+              <a:rPr lang="en-US"/>
               <a:t>Click to edit Master title style</a:t>
             </a:r>
-            <a:endParaRPr lang="en-US"/>
           </a:p>
         </p:txBody>
       </p:sp>
@@ -1890,7 +3663,7 @@
           <a:p>
             <a:fld id="{5BCAD085-E8A6-8845-BD4E-CB4CCA059FC4}" type="datetimeFigureOut">
               <a:rPr lang="en-US" smtClean="0"/>
-              <a:t>1/27/13</a:t>
+              <a:t>4/2/26</a:t>
             </a:fld>
             <a:endParaRPr lang="en-US"/>
           </a:p>
@@ -1985,7 +3758,7 @@
           <a:p>
             <a:fld id="{5BCAD085-E8A6-8845-BD4E-CB4CCA059FC4}" type="datetimeFigureOut">
               <a:rPr lang="en-US" smtClean="0"/>
-              <a:t>1/27/13</a:t>
+              <a:t>4/2/26</a:t>
             </a:fld>
             <a:endParaRPr lang="en-US"/>
           </a:p>
@@ -2088,10 +3861,9 @@
           </a:lstStyle>
           <a:p>
             <a:r>
-              <a:rPr lang="en-US" smtClean="0"/>
+              <a:rPr lang="en-US"/>
               <a:t>Click to edit Master title style</a:t>
             </a:r>
-            <a:endParaRPr lang="en-US"/>
           </a:p>
         </p:txBody>
       </p:sp>
@@ -2145,38 +3917,37 @@
           <a:p>
             <a:pPr lvl="0"/>
             <a:r>
-              <a:rPr lang="en-US" smtClean="0"/>
+              <a:rPr lang="en-US"/>
               <a:t>Click to edit Master text styles</a:t>
             </a:r>
           </a:p>
           <a:p>
             <a:pPr lvl="1"/>
             <a:r>
-              <a:rPr lang="en-US" smtClean="0"/>
+              <a:rPr lang="en-US"/>
               <a:t>Second level</a:t>
             </a:r>
           </a:p>
           <a:p>
             <a:pPr lvl="2"/>
             <a:r>
-              <a:rPr lang="en-US" smtClean="0"/>
+              <a:rPr lang="en-US"/>
               <a:t>Third level</a:t>
             </a:r>
           </a:p>
           <a:p>
             <a:pPr lvl="3"/>
             <a:r>
-              <a:rPr lang="en-US" smtClean="0"/>
+              <a:rPr lang="en-US"/>
               <a:t>Fourth level</a:t>
             </a:r>
           </a:p>
           <a:p>
             <a:pPr lvl="4"/>
             <a:r>
-              <a:rPr lang="en-US" smtClean="0"/>
+              <a:rPr lang="en-US"/>
               <a:t>Fifth level</a:t>
             </a:r>
-            <a:endParaRPr lang="en-US"/>
           </a:p>
         </p:txBody>
       </p:sp>
@@ -2239,7 +4010,7 @@
           <a:p>
             <a:pPr lvl="0"/>
             <a:r>
-              <a:rPr lang="en-US" smtClean="0"/>
+              <a:rPr lang="en-US"/>
               <a:t>Click to edit Master text styles</a:t>
             </a:r>
           </a:p>
@@ -2262,7 +4033,7 @@
           <a:p>
             <a:fld id="{5BCAD085-E8A6-8845-BD4E-CB4CCA059FC4}" type="datetimeFigureOut">
               <a:rPr lang="en-US" smtClean="0"/>
-              <a:t>1/27/13</a:t>
+              <a:t>4/2/26</a:t>
             </a:fld>
             <a:endParaRPr lang="en-US"/>
           </a:p>
@@ -2365,10 +4136,9 @@
           </a:lstStyle>
           <a:p>
             <a:r>
-              <a:rPr lang="en-US" smtClean="0"/>
+              <a:rPr lang="en-US"/>
               <a:t>Click to edit Master title style</a:t>
             </a:r>
-            <a:endParaRPr lang="en-US"/>
           </a:p>
         </p:txBody>
       </p:sp>
@@ -2492,7 +4262,7 @@
           <a:p>
             <a:pPr lvl="0"/>
             <a:r>
-              <a:rPr lang="en-US" smtClean="0"/>
+              <a:rPr lang="en-US"/>
               <a:t>Click to edit Master text styles</a:t>
             </a:r>
           </a:p>
@@ -2515,7 +4285,7 @@
           <a:p>
             <a:fld id="{5BCAD085-E8A6-8845-BD4E-CB4CCA059FC4}" type="datetimeFigureOut">
               <a:rPr lang="en-US" smtClean="0"/>
-              <a:t>1/27/13</a:t>
+              <a:t>4/2/26</a:t>
             </a:fld>
             <a:endParaRPr lang="en-US"/>
           </a:p>
@@ -2624,10 +4394,9 @@
           <a:lstStyle/>
           <a:p>
             <a:r>
-              <a:rPr lang="en-US" smtClean="0"/>
+              <a:rPr lang="en-US"/>
               <a:t>Click to edit Master title style</a:t>
             </a:r>
-            <a:endParaRPr lang="en-US"/>
           </a:p>
         </p:txBody>
       </p:sp>
@@ -2658,38 +4427,37 @@
           <a:p>
             <a:pPr lvl="0"/>
             <a:r>
-              <a:rPr lang="en-US" smtClean="0"/>
+              <a:rPr lang="en-US"/>
               <a:t>Click to edit Master text styles</a:t>
             </a:r>
           </a:p>
           <a:p>
             <a:pPr lvl="1"/>
             <a:r>
-              <a:rPr lang="en-US" smtClean="0"/>
+              <a:rPr lang="en-US"/>
               <a:t>Second level</a:t>
             </a:r>
           </a:p>
           <a:p>
             <a:pPr lvl="2"/>
             <a:r>
-              <a:rPr lang="en-US" smtClean="0"/>
+              <a:rPr lang="en-US"/>
               <a:t>Third level</a:t>
             </a:r>
           </a:p>
           <a:p>
             <a:pPr lvl="3"/>
             <a:r>
-              <a:rPr lang="en-US" smtClean="0"/>
+              <a:rPr lang="en-US"/>
               <a:t>Fourth level</a:t>
             </a:r>
           </a:p>
           <a:p>
             <a:pPr lvl="4"/>
             <a:r>
-              <a:rPr lang="en-US" smtClean="0"/>
+              <a:rPr lang="en-US"/>
               <a:t>Fifth level</a:t>
             </a:r>
-            <a:endParaRPr lang="en-US"/>
           </a:p>
         </p:txBody>
       </p:sp>
@@ -2728,7 +4496,7 @@
           <a:p>
             <a:fld id="{5BCAD085-E8A6-8845-BD4E-CB4CCA059FC4}" type="datetimeFigureOut">
               <a:rPr lang="en-US" smtClean="0"/>
-              <a:t>1/27/13</a:t>
+              <a:t>4/2/26</a:t>
             </a:fld>
             <a:endParaRPr lang="en-US"/>
           </a:p>
@@ -3087,7 +4855,7 @@
 </file>
 
 <file path=ppt/slides/slide1.xml><?xml version="1.0" encoding="utf-8"?>
-<p:sld xmlns:a="http://schemas.openxmlformats.org/drawingml/2006/main" xmlns:p="http://schemas.openxmlformats.org/presentationml/2006/main" xmlns:r="http://schemas.openxmlformats.org/officeDocument/2006/relationships">
+<p:sld xmlns:a="http://schemas.openxmlformats.org/drawingml/2006/main" xmlns:r="http://schemas.openxmlformats.org/officeDocument/2006/relationships" xmlns:p="http://schemas.openxmlformats.org/presentationml/2006/main">
   <p:cSld>
     <p:bg>
       <p:bgPr>
@@ -3103,7 +4871,14 @@
         <p:cNvGrpSpPr/>
         <p:nvPr/>
       </p:nvGrpSpPr>
-      <p:grpSpPr/>
+      <p:grpSpPr>
+        <a:xfrm>
+          <a:off x="0" y="0"/>
+          <a:ext cx="0" cy="0"/>
+          <a:chOff x="0" y="0"/>
+          <a:chExt cx="0" cy="0"/>
+        </a:xfrm>
+      </p:grpSpPr>
       <p:sp>
         <p:nvSpPr>
           <p:cNvPr id="2" name="Rounded Rectangle 1"/>
@@ -3144,6 +4919,7 @@
           <a:lstStyle/>
           <a:p>
             <a:pPr algn="ctr"/>
+            <a:endParaRPr/>
           </a:p>
         </p:txBody>
       </p:sp>
@@ -3475,6 +5251,532 @@
             </a:pPr>
             <a:r>
               <a:t>Flask</a:t>
+            </a:r>
+          </a:p>
+        </p:txBody>
+      </p:sp>
+    </p:spTree>
+  </p:cSld>
+  <p:clrMapOvr>
+    <a:masterClrMapping/>
+  </p:clrMapOvr>
+</p:sld>
+</file>
+
+<file path=ppt/slides/slide10.xml><?xml version="1.0" encoding="utf-8"?>
+<p:sld xmlns:a="http://schemas.openxmlformats.org/drawingml/2006/main" xmlns:p="http://schemas.openxmlformats.org/presentationml/2006/main" xmlns:r="http://schemas.openxmlformats.org/officeDocument/2006/relationships">
+  <p:cSld>
+    <p:spTree>
+      <p:nvGrpSpPr>
+        <p:cNvPr id="1" name=""/>
+        <p:cNvGrpSpPr/>
+        <p:nvPr/>
+      </p:nvGrpSpPr>
+      <p:grpSpPr/>
+      <p:sp>
+        <p:nvSpPr>
+          <p:cNvPr id="2" name="Rectangle 1"/>
+          <p:cNvSpPr/>
+          <p:nvPr/>
+        </p:nvSpPr>
+        <p:spPr>
+          <a:xfrm>
+            <a:off x="0" y="0"/>
+            <a:ext cx="9144000" cy="5143500"/>
+          </a:xfrm>
+          <a:prstGeom prst="rect">
+            <a:avLst/>
+          </a:prstGeom>
+          <a:solidFill>
+            <a:srgbClr val="0F1117"/>
+          </a:solidFill>
+          <a:ln>
+            <a:solidFill>
+              <a:srgbClr val="0F1117"/>
+            </a:solidFill>
+          </a:ln>
+        </p:spPr>
+        <p:style>
+          <a:lnRef idx="1">
+            <a:schemeClr val="accent1"/>
+          </a:lnRef>
+          <a:fillRef idx="3">
+            <a:schemeClr val="accent1"/>
+          </a:fillRef>
+          <a:effectRef idx="2">
+            <a:schemeClr val="accent1"/>
+          </a:effectRef>
+          <a:fontRef idx="minor">
+            <a:schemeClr val="lt1"/>
+          </a:fontRef>
+        </p:style>
+        <p:txBody>
+          <a:bodyPr rtlCol="0" anchor="ctr"/>
+          <a:lstStyle/>
+          <a:p>
+            <a:pPr algn="ctr"/>
+          </a:p>
+        </p:txBody>
+      </p:sp>
+      <p:sp>
+        <p:nvSpPr>
+          <p:cNvPr id="3" name="TextBox 2"/>
+          <p:cNvSpPr txBox="1"/>
+          <p:nvPr/>
+        </p:nvSpPr>
+        <p:spPr>
+          <a:xfrm>
+            <a:off x="457200" y="365760"/>
+            <a:ext cx="8229600" cy="731520"/>
+          </a:xfrm>
+          <a:prstGeom prst="rect">
+            <a:avLst/>
+          </a:prstGeom>
+          <a:noFill/>
+        </p:spPr>
+        <p:txBody>
+          <a:bodyPr wrap="none">
+            <a:spAutoFit/>
+          </a:bodyPr>
+          <a:lstStyle/>
+          <a:p>
+            <a:pPr>
+              <a:defRPr sz="3200" b="1">
+                <a:solidFill>
+                  <a:srgbClr val="FFFFFF"/>
+                </a:solidFill>
+              </a:defRPr>
+            </a:pPr>
+            <a:r>
+              <a:t>Chunking Strategies</a:t>
+            </a:r>
+          </a:p>
+        </p:txBody>
+      </p:sp>
+      <p:sp>
+        <p:nvSpPr>
+          <p:cNvPr id="4" name="Rounded Rectangle 3"/>
+          <p:cNvSpPr/>
+          <p:nvPr/>
+        </p:nvSpPr>
+        <p:spPr>
+          <a:xfrm>
+            <a:off x="457200" y="1097280"/>
+            <a:ext cx="3931920" cy="3474720"/>
+          </a:xfrm>
+          <a:prstGeom prst="roundRect">
+            <a:avLst/>
+          </a:prstGeom>
+          <a:solidFill>
+            <a:srgbClr val="1A1E2B"/>
+          </a:solidFill>
+          <a:ln>
+            <a:solidFill>
+              <a:srgbClr val="818CF8"/>
+            </a:solidFill>
+          </a:ln>
+        </p:spPr>
+        <p:style>
+          <a:lnRef idx="1">
+            <a:schemeClr val="accent1"/>
+          </a:lnRef>
+          <a:fillRef idx="3">
+            <a:schemeClr val="accent1"/>
+          </a:fillRef>
+          <a:effectRef idx="2">
+            <a:schemeClr val="accent1"/>
+          </a:effectRef>
+          <a:fontRef idx="minor">
+            <a:schemeClr val="lt1"/>
+          </a:fontRef>
+        </p:style>
+        <p:txBody>
+          <a:bodyPr rtlCol="0" anchor="ctr"/>
+          <a:lstStyle/>
+          <a:p>
+            <a:pPr algn="ctr"/>
+          </a:p>
+        </p:txBody>
+      </p:sp>
+      <p:sp>
+        <p:nvSpPr>
+          <p:cNvPr id="5" name="TextBox 4"/>
+          <p:cNvSpPr txBox="1"/>
+          <p:nvPr/>
+        </p:nvSpPr>
+        <p:spPr>
+          <a:xfrm>
+            <a:off x="548640" y="1188720"/>
+            <a:ext cx="3749039" cy="457200"/>
+          </a:xfrm>
+          <a:prstGeom prst="rect">
+            <a:avLst/>
+          </a:prstGeom>
+          <a:noFill/>
+        </p:spPr>
+        <p:txBody>
+          <a:bodyPr wrap="none">
+            <a:spAutoFit/>
+          </a:bodyPr>
+          <a:lstStyle/>
+          <a:p>
+            <a:pPr>
+              <a:defRPr sz="2000" b="1">
+                <a:solidFill>
+                  <a:srgbClr val="818CF8"/>
+                </a:solidFill>
+              </a:defRPr>
+            </a:pPr>
+            <a:r>
+              <a:t>Current method</a:t>
+            </a:r>
+          </a:p>
+          <a:p>
+            <a:pPr>
+              <a:defRPr sz="1600" b="1">
+                <a:solidFill>
+                  <a:srgbClr val="FFFFFF"/>
+                </a:solidFill>
+              </a:defRPr>
+            </a:pPr>
+            <a:r>
+              <a:t>Split by Newlines/Paragraphs</a:t>
+            </a:r>
+          </a:p>
+        </p:txBody>
+      </p:sp>
+      <p:sp>
+        <p:nvSpPr>
+          <p:cNvPr id="6" name="TextBox 5"/>
+          <p:cNvSpPr txBox="1"/>
+          <p:nvPr/>
+        </p:nvSpPr>
+        <p:spPr>
+          <a:xfrm>
+            <a:off x="548640" y="1828800"/>
+            <a:ext cx="3749039" cy="2560320"/>
+          </a:xfrm>
+          <a:prstGeom prst="rect">
+            <a:avLst/>
+          </a:prstGeom>
+          <a:noFill/>
+        </p:spPr>
+        <p:txBody>
+          <a:bodyPr wrap="square">
+            <a:spAutoFit/>
+          </a:bodyPr>
+          <a:lstStyle/>
+          <a:p>
+            <a:pPr>
+              <a:defRPr sz="1400">
+                <a:solidFill>
+                  <a:srgbClr val="C8C8C8"/>
+                </a:solidFill>
+                <a:latin typeface="Courier New"/>
+              </a:defRPr>
+            </a:pPr>
+            <a:r>
+              <a:t>Code:</a:t>
+            </a:r>
+            <a:br/>
+            <a:r>
+              <a:t>chunks = text.split("\n")</a:t>
+            </a:r>
+          </a:p>
+          <a:p>
+            <a:br/>
+            <a:pPr>
+              <a:defRPr sz="1600" b="1">
+                <a:solidFill>
+                  <a:srgbClr val="34D399"/>
+                </a:solidFill>
+              </a:defRPr>
+            </a:pPr>
+            <a:r>
+              <a:t>✓ Pros:</a:t>
+            </a:r>
+          </a:p>
+          <a:p>
+            <a:pPr>
+              <a:defRPr sz="1400">
+                <a:solidFill>
+                  <a:srgbClr val="DCDCDC"/>
+                </a:solidFill>
+              </a:defRPr>
+            </a:pPr>
+            <a:r>
+              <a:t>  • Simple &amp; fast</a:t>
+            </a:r>
+            <a:br/>
+            <a:r>
+              <a:t>  • Preserves context</a:t>
+            </a:r>
+            <a:br/>
+            <a:r>
+              <a:t>  • No overlap needed</a:t>
+            </a:r>
+          </a:p>
+          <a:p>
+            <a:br/>
+            <a:pPr>
+              <a:defRPr sz="1600" b="1">
+                <a:solidFill>
+                  <a:srgbClr val="FD79A8"/>
+                </a:solidFill>
+              </a:defRPr>
+            </a:pPr>
+            <a:r>
+              <a:t>✗ Cons:</a:t>
+            </a:r>
+          </a:p>
+          <a:p>
+            <a:pPr>
+              <a:defRPr sz="1400">
+                <a:solidFill>
+                  <a:srgbClr val="DCDCDC"/>
+                </a:solidFill>
+              </a:defRPr>
+            </a:pPr>
+            <a:r>
+              <a:t>  • Unequal chunk sizes</a:t>
+            </a:r>
+            <a:br/>
+            <a:r>
+              <a:t>  • May lose meaning if short</a:t>
+            </a:r>
+            <a:br/>
+            <a:r>
+              <a:t>  • Paragraph-dependent</a:t>
+            </a:r>
+          </a:p>
+        </p:txBody>
+      </p:sp>
+      <p:sp>
+        <p:nvSpPr>
+          <p:cNvPr id="7" name="TextBox 6"/>
+          <p:cNvSpPr txBox="1"/>
+          <p:nvPr/>
+        </p:nvSpPr>
+        <p:spPr>
+          <a:xfrm>
+            <a:off x="4572000" y="1188720"/>
+            <a:ext cx="4114800" cy="457200"/>
+          </a:xfrm>
+          <a:prstGeom prst="rect">
+            <a:avLst/>
+          </a:prstGeom>
+          <a:noFill/>
+        </p:spPr>
+        <p:txBody>
+          <a:bodyPr wrap="none">
+            <a:spAutoFit/>
+          </a:bodyPr>
+          <a:lstStyle/>
+          <a:p>
+            <a:pPr>
+              <a:defRPr sz="2000" b="1">
+                <a:solidFill>
+                  <a:srgbClr val="FDCB6E"/>
+                </a:solidFill>
+              </a:defRPr>
+            </a:pPr>
+            <a:r>
+              <a:t>Alternative methods</a:t>
+            </a:r>
+          </a:p>
+        </p:txBody>
+      </p:sp>
+      <p:sp>
+        <p:nvSpPr>
+          <p:cNvPr id="8" name="Rounded Rectangle 7"/>
+          <p:cNvSpPr/>
+          <p:nvPr/>
+        </p:nvSpPr>
+        <p:spPr>
+          <a:xfrm>
+            <a:off x="4572000" y="1645920"/>
+            <a:ext cx="4114800" cy="2926080"/>
+          </a:xfrm>
+          <a:prstGeom prst="roundRect">
+            <a:avLst/>
+          </a:prstGeom>
+          <a:solidFill>
+            <a:srgbClr val="1A1E2B"/>
+          </a:solidFill>
+          <a:ln>
+            <a:solidFill>
+              <a:srgbClr val="FDCB6E"/>
+            </a:solidFill>
+          </a:ln>
+        </p:spPr>
+        <p:style>
+          <a:lnRef idx="1">
+            <a:schemeClr val="accent1"/>
+          </a:lnRef>
+          <a:fillRef idx="3">
+            <a:schemeClr val="accent1"/>
+          </a:fillRef>
+          <a:effectRef idx="2">
+            <a:schemeClr val="accent1"/>
+          </a:effectRef>
+          <a:fontRef idx="minor">
+            <a:schemeClr val="lt1"/>
+          </a:fontRef>
+        </p:style>
+        <p:txBody>
+          <a:bodyPr rtlCol="0" anchor="ctr"/>
+          <a:lstStyle/>
+          <a:p>
+            <a:pPr algn="ctr"/>
+          </a:p>
+        </p:txBody>
+      </p:sp>
+      <p:sp>
+        <p:nvSpPr>
+          <p:cNvPr id="9" name="TextBox 8"/>
+          <p:cNvSpPr txBox="1"/>
+          <p:nvPr/>
+        </p:nvSpPr>
+        <p:spPr>
+          <a:xfrm>
+            <a:off x="4663440" y="1737360"/>
+            <a:ext cx="3931920" cy="2743200"/>
+          </a:xfrm>
+          <a:prstGeom prst="rect">
+            <a:avLst/>
+          </a:prstGeom>
+          <a:noFill/>
+        </p:spPr>
+        <p:txBody>
+          <a:bodyPr wrap="square">
+            <a:spAutoFit/>
+          </a:bodyPr>
+          <a:lstStyle/>
+          <a:p>
+            <a:pPr>
+              <a:defRPr b="1" sz="1400">
+                <a:solidFill>
+                  <a:srgbClr val="FFFFFF"/>
+                </a:solidFill>
+              </a:defRPr>
+            </a:pPr>
+            <a:r>
+              <a:t>1️⃣ Fixed Size</a:t>
+            </a:r>
+          </a:p>
+          <a:p>
+            <a:pPr>
+              <a:defRPr sz="1200">
+                <a:solidFill>
+                  <a:srgbClr val="C8C8C8"/>
+                </a:solidFill>
+              </a:defRPr>
+            </a:pPr>
+            <a:r>
+              <a:t>  • Split by word count (e.g., 256 words)</a:t>
+            </a:r>
+            <a:br/>
+            <a:r>
+              <a:t>  • Consistent but may cut mid-sentence</a:t>
+            </a:r>
+          </a:p>
+          <a:p>
+            <a:pPr>
+              <a:defRPr sz="400"/>
+            </a:pPr>
+          </a:p>
+          <a:p>
+            <a:pPr>
+              <a:defRPr b="1" sz="1400">
+                <a:solidFill>
+                  <a:srgbClr val="FFFFFF"/>
+                </a:solidFill>
+              </a:defRPr>
+            </a:pPr>
+            <a:r>
+              <a:t>2️⃣ Semantic Chunking</a:t>
+            </a:r>
+          </a:p>
+          <a:p>
+            <a:pPr>
+              <a:defRPr sz="1200">
+                <a:solidFill>
+                  <a:srgbClr val="C8C8C8"/>
+                </a:solidFill>
+              </a:defRPr>
+            </a:pPr>
+            <a:r>
+              <a:t>  • Break at natural topic boundaries</a:t>
+            </a:r>
+            <a:br/>
+            <a:r>
+              <a:t>  • Requires NLP (spacy, nltk)</a:t>
+            </a:r>
+          </a:p>
+          <a:p>
+            <a:pPr>
+              <a:defRPr sz="400"/>
+            </a:pPr>
+          </a:p>
+          <a:p>
+            <a:pPr>
+              <a:defRPr b="1" sz="1400">
+                <a:solidFill>
+                  <a:srgbClr val="FFFFFF"/>
+                </a:solidFill>
+              </a:defRPr>
+            </a:pPr>
+            <a:r>
+              <a:t>3️⃣ Recursive Chunking</a:t>
+            </a:r>
+          </a:p>
+          <a:p>
+            <a:pPr>
+              <a:defRPr sz="1200">
+                <a:solidFill>
+                  <a:srgbClr val="C8C8C8"/>
+                </a:solidFill>
+              </a:defRPr>
+            </a:pPr>
+            <a:r>
+              <a:t>  • Preserve structure (headers, lists)</a:t>
+            </a:r>
+            <a:br/>
+            <a:r>
+              <a:t>  • Use langchain, tree-sitter</a:t>
+            </a:r>
+          </a:p>
+          <a:p>
+            <a:pPr>
+              <a:defRPr sz="400"/>
+            </a:pPr>
+          </a:p>
+          <a:p>
+            <a:pPr>
+              <a:defRPr b="1" sz="1400">
+                <a:solidFill>
+                  <a:srgbClr val="FFFFFF"/>
+                </a:solidFill>
+              </a:defRPr>
+            </a:pPr>
+            <a:r>
+              <a:t>4️⃣ Sliding Window</a:t>
+            </a:r>
+          </a:p>
+          <a:p>
+            <a:pPr>
+              <a:defRPr sz="1200">
+                <a:solidFill>
+                  <a:srgbClr val="C8C8C8"/>
+                </a:solidFill>
+              </a:defRPr>
+            </a:pPr>
+            <a:r>
+              <a:t>  • Overlapping chunks (e.g., 256 + 50 overlap)</a:t>
+            </a:r>
+            <a:br/>
+            <a:r>
+              <a:t>  • Better context preservation</a:t>
             </a:r>
           </a:p>
         </p:txBody>
@@ -3488,7 +5790,7 @@
 </file>
 
 <file path=ppt/slides/slide2.xml><?xml version="1.0" encoding="utf-8"?>
-<p:sld xmlns:a="http://schemas.openxmlformats.org/drawingml/2006/main" xmlns:p="http://schemas.openxmlformats.org/presentationml/2006/main" xmlns:r="http://schemas.openxmlformats.org/officeDocument/2006/relationships">
+<p:sld xmlns:a="http://schemas.openxmlformats.org/drawingml/2006/main" xmlns:r="http://schemas.openxmlformats.org/officeDocument/2006/relationships" xmlns:p="http://schemas.openxmlformats.org/presentationml/2006/main">
   <p:cSld>
     <p:bg>
       <p:bgPr>
@@ -3504,7 +5806,14 @@
         <p:cNvGrpSpPr/>
         <p:nvPr/>
       </p:nvGrpSpPr>
-      <p:grpSpPr/>
+      <p:grpSpPr>
+        <a:xfrm>
+          <a:off x="0" y="0"/>
+          <a:ext cx="0" cy="0"/>
+          <a:chOff x="0" y="0"/>
+          <a:chExt cx="0" cy="0"/>
+        </a:xfrm>
+      </p:grpSpPr>
       <p:sp>
         <p:nvSpPr>
           <p:cNvPr id="2" name="TextBox 1"/>
@@ -3619,6 +5928,7 @@
           <a:lstStyle/>
           <a:p>
             <a:pPr algn="ctr"/>
+            <a:endParaRPr/>
           </a:p>
         </p:txBody>
       </p:sp>
@@ -3776,6 +6086,7 @@
           <a:lstStyle/>
           <a:p>
             <a:pPr algn="ctr"/>
+            <a:endParaRPr/>
           </a:p>
         </p:txBody>
       </p:sp>
@@ -3933,6 +6244,7 @@
           <a:lstStyle/>
           <a:p>
             <a:pPr algn="ctr"/>
+            <a:endParaRPr/>
           </a:p>
         </p:txBody>
       </p:sp>
@@ -4090,6 +6402,7 @@
           <a:lstStyle/>
           <a:p>
             <a:pPr algn="ctr"/>
+            <a:endParaRPr/>
           </a:p>
         </p:txBody>
       </p:sp>
@@ -4178,7 +6491,7 @@
 </file>
 
 <file path=ppt/slides/slide3.xml><?xml version="1.0" encoding="utf-8"?>
-<p:sld xmlns:a="http://schemas.openxmlformats.org/drawingml/2006/main" xmlns:p="http://schemas.openxmlformats.org/presentationml/2006/main" xmlns:r="http://schemas.openxmlformats.org/officeDocument/2006/relationships">
+<p:sld xmlns:a="http://schemas.openxmlformats.org/drawingml/2006/main" xmlns:r="http://schemas.openxmlformats.org/officeDocument/2006/relationships" xmlns:p="http://schemas.openxmlformats.org/presentationml/2006/main">
   <p:cSld>
     <p:bg>
       <p:bgPr>
@@ -4194,7 +6507,14 @@
         <p:cNvGrpSpPr/>
         <p:nvPr/>
       </p:nvGrpSpPr>
-      <p:grpSpPr/>
+      <p:grpSpPr>
+        <a:xfrm>
+          <a:off x="0" y="0"/>
+          <a:ext cx="0" cy="0"/>
+          <a:chOff x="0" y="0"/>
+          <a:chExt cx="0" cy="0"/>
+        </a:xfrm>
+      </p:grpSpPr>
       <p:sp>
         <p:nvSpPr>
           <p:cNvPr id="2" name="TextBox 1"/>
@@ -4732,6 +7052,7 @@
           <a:lstStyle/>
           <a:p>
             <a:pPr algn="ctr"/>
+            <a:endParaRPr/>
           </a:p>
         </p:txBody>
       </p:sp>
@@ -4820,7 +7141,7 @@
 </file>
 
 <file path=ppt/slides/slide4.xml><?xml version="1.0" encoding="utf-8"?>
-<p:sld xmlns:a="http://schemas.openxmlformats.org/drawingml/2006/main" xmlns:p="http://schemas.openxmlformats.org/presentationml/2006/main" xmlns:r="http://schemas.openxmlformats.org/officeDocument/2006/relationships">
+<p:sld xmlns:a="http://schemas.openxmlformats.org/drawingml/2006/main" xmlns:r="http://schemas.openxmlformats.org/officeDocument/2006/relationships" xmlns:p="http://schemas.openxmlformats.org/presentationml/2006/main">
   <p:cSld>
     <p:bg>
       <p:bgPr>
@@ -4836,7 +7157,14 @@
         <p:cNvGrpSpPr/>
         <p:nvPr/>
       </p:nvGrpSpPr>
-      <p:grpSpPr/>
+      <p:grpSpPr>
+        <a:xfrm>
+          <a:off x="0" y="0"/>
+          <a:ext cx="0" cy="0"/>
+          <a:chOff x="0" y="0"/>
+          <a:chExt cx="0" cy="0"/>
+        </a:xfrm>
+      </p:grpSpPr>
       <p:sp>
         <p:nvSpPr>
           <p:cNvPr id="2" name="TextBox 1"/>
@@ -4951,6 +7279,7 @@
           <a:lstStyle/>
           <a:p>
             <a:pPr algn="ctr"/>
+            <a:endParaRPr/>
           </a:p>
         </p:txBody>
       </p:sp>
@@ -5125,6 +7454,7 @@
           <a:lstStyle/>
           <a:p>
             <a:pPr algn="ctr"/>
+            <a:endParaRPr/>
           </a:p>
         </p:txBody>
       </p:sp>
@@ -5299,6 +7629,7 @@
           <a:lstStyle/>
           <a:p>
             <a:pPr algn="ctr"/>
+            <a:endParaRPr/>
           </a:p>
         </p:txBody>
       </p:sp>
@@ -5505,7 +7836,7 @@
           </a:fontRef>
         </p:style>
         <p:txBody>
-          <a:bodyPr rtlCol="0" anchor="ctr" wrap="square" lIns="177800" tIns="127000" bIns="127000"/>
+          <a:bodyPr wrap="square" lIns="177800" tIns="127000" bIns="127000" rtlCol="0" anchor="ctr"/>
           <a:lstStyle/>
           <a:p>
             <a:pPr algn="ctr">
@@ -5567,6 +7898,7 @@
                 <a:latin typeface="Consolas"/>
               </a:defRPr>
             </a:pPr>
+            <a:endParaRPr/>
           </a:p>
           <a:p>
             <a:pPr>
@@ -5612,6 +7944,7 @@
                 <a:latin typeface="Consolas"/>
               </a:defRPr>
             </a:pPr>
+            <a:endParaRPr/>
           </a:p>
           <a:p>
             <a:pPr>
@@ -5753,6 +8086,7 @@
           <a:lstStyle/>
           <a:p>
             <a:pPr algn="ctr"/>
+            <a:endParaRPr/>
           </a:p>
         </p:txBody>
       </p:sp>
@@ -5801,7 +8135,7 @@
 </file>
 
 <file path=ppt/slides/slide5.xml><?xml version="1.0" encoding="utf-8"?>
-<p:sld xmlns:a="http://schemas.openxmlformats.org/drawingml/2006/main" xmlns:p="http://schemas.openxmlformats.org/presentationml/2006/main" xmlns:r="http://schemas.openxmlformats.org/officeDocument/2006/relationships">
+<p:sld xmlns:a="http://schemas.openxmlformats.org/drawingml/2006/main" xmlns:r="http://schemas.openxmlformats.org/officeDocument/2006/relationships" xmlns:p="http://schemas.openxmlformats.org/presentationml/2006/main">
   <p:cSld>
     <p:bg>
       <p:bgPr>
@@ -5817,7 +8151,14 @@
         <p:cNvGrpSpPr/>
         <p:nvPr/>
       </p:nvGrpSpPr>
-      <p:grpSpPr/>
+      <p:grpSpPr>
+        <a:xfrm>
+          <a:off x="0" y="0"/>
+          <a:ext cx="0" cy="0"/>
+          <a:chOff x="0" y="0"/>
+          <a:chExt cx="0" cy="0"/>
+        </a:xfrm>
+      </p:grpSpPr>
       <p:sp>
         <p:nvSpPr>
           <p:cNvPr id="2" name="TextBox 1"/>
@@ -5932,6 +8273,7 @@
           <a:lstStyle/>
           <a:p>
             <a:pPr algn="ctr"/>
+            <a:endParaRPr/>
           </a:p>
         </p:txBody>
       </p:sp>
@@ -6102,6 +8444,7 @@
           <a:lstStyle/>
           <a:p>
             <a:pPr algn="ctr"/>
+            <a:endParaRPr/>
           </a:p>
         </p:txBody>
       </p:sp>
@@ -6272,6 +8615,7 @@
           <a:lstStyle/>
           <a:p>
             <a:pPr algn="ctr"/>
+            <a:endParaRPr/>
           </a:p>
         </p:txBody>
       </p:sp>
@@ -6442,6 +8786,7 @@
           <a:lstStyle/>
           <a:p>
             <a:pPr algn="ctr"/>
+            <a:endParaRPr/>
           </a:p>
         </p:txBody>
       </p:sp>
@@ -6644,7 +8989,7 @@
           </a:fontRef>
         </p:style>
         <p:txBody>
-          <a:bodyPr rtlCol="0" anchor="ctr" wrap="square" lIns="177800" tIns="127000" bIns="127000"/>
+          <a:bodyPr wrap="square" lIns="177800" tIns="127000" bIns="127000" rtlCol="0" anchor="ctr"/>
           <a:lstStyle/>
           <a:p>
             <a:pPr algn="ctr">
@@ -6690,6 +9035,7 @@
                 <a:latin typeface="Consolas"/>
               </a:defRPr>
             </a:pPr>
+            <a:endParaRPr/>
           </a:p>
           <a:p>
             <a:pPr>
@@ -6783,6 +9129,7 @@
                 <a:latin typeface="Consolas"/>
               </a:defRPr>
             </a:pPr>
+            <a:endParaRPr/>
           </a:p>
           <a:p>
             <a:pPr>
@@ -6844,6 +9191,7 @@
                 <a:latin typeface="Consolas"/>
               </a:defRPr>
             </a:pPr>
+            <a:endParaRPr/>
           </a:p>
           <a:p>
             <a:pPr>
@@ -6952,7 +9300,7 @@
 </file>
 
 <file path=ppt/slides/slide6.xml><?xml version="1.0" encoding="utf-8"?>
-<p:sld xmlns:a="http://schemas.openxmlformats.org/drawingml/2006/main" xmlns:p="http://schemas.openxmlformats.org/presentationml/2006/main" xmlns:r="http://schemas.openxmlformats.org/officeDocument/2006/relationships">
+<p:sld xmlns:a="http://schemas.openxmlformats.org/drawingml/2006/main" xmlns:r="http://schemas.openxmlformats.org/officeDocument/2006/relationships" xmlns:p="http://schemas.openxmlformats.org/presentationml/2006/main">
   <p:cSld>
     <p:bg>
       <p:bgPr>
@@ -6968,7 +9316,14 @@
         <p:cNvGrpSpPr/>
         <p:nvPr/>
       </p:nvGrpSpPr>
-      <p:grpSpPr/>
+      <p:grpSpPr>
+        <a:xfrm>
+          <a:off x="0" y="0"/>
+          <a:ext cx="0" cy="0"/>
+          <a:chOff x="0" y="0"/>
+          <a:chExt cx="0" cy="0"/>
+        </a:xfrm>
+      </p:grpSpPr>
       <p:sp>
         <p:nvSpPr>
           <p:cNvPr id="2" name="TextBox 1"/>
@@ -7122,6 +9477,7 @@
                 <a:latin typeface="Calibri"/>
               </a:defRPr>
             </a:pPr>
+            <a:endParaRPr/>
           </a:p>
           <a:p>
             <a:pPr>
@@ -7183,6 +9539,7 @@
                 <a:latin typeface="Calibri"/>
               </a:defRPr>
             </a:pPr>
+            <a:endParaRPr/>
           </a:p>
           <a:p>
             <a:pPr>
@@ -7356,7 +9713,7 @@
           </a:fontRef>
         </p:style>
         <p:txBody>
-          <a:bodyPr rtlCol="0" anchor="ctr" wrap="square" lIns="177800" tIns="127000" bIns="127000"/>
+          <a:bodyPr wrap="square" lIns="177800" tIns="127000" bIns="127000" rtlCol="0" anchor="ctr"/>
           <a:lstStyle/>
           <a:p>
             <a:pPr algn="ctr">
@@ -7450,6 +9807,7 @@
                 <a:latin typeface="Consolas"/>
               </a:defRPr>
             </a:pPr>
+            <a:endParaRPr/>
           </a:p>
           <a:p>
             <a:pPr>
@@ -7595,6 +9953,7 @@
           <a:lstStyle/>
           <a:p>
             <a:pPr algn="ctr"/>
+            <a:endParaRPr/>
           </a:p>
         </p:txBody>
       </p:sp>
@@ -7651,7 +10010,7 @@
 </file>
 
 <file path=ppt/slides/slide7.xml><?xml version="1.0" encoding="utf-8"?>
-<p:sld xmlns:a="http://schemas.openxmlformats.org/drawingml/2006/main" xmlns:p="http://schemas.openxmlformats.org/presentationml/2006/main" xmlns:r="http://schemas.openxmlformats.org/officeDocument/2006/relationships">
+<p:sld xmlns:a="http://schemas.openxmlformats.org/drawingml/2006/main" xmlns:r="http://schemas.openxmlformats.org/officeDocument/2006/relationships" xmlns:p="http://schemas.openxmlformats.org/presentationml/2006/main">
   <p:cSld>
     <p:bg>
       <p:bgPr>
@@ -7667,7 +10026,14 @@
         <p:cNvGrpSpPr/>
         <p:nvPr/>
       </p:nvGrpSpPr>
-      <p:grpSpPr/>
+      <p:grpSpPr>
+        <a:xfrm>
+          <a:off x="0" y="0"/>
+          <a:ext cx="0" cy="0"/>
+          <a:chOff x="0" y="0"/>
+          <a:chExt cx="0" cy="0"/>
+        </a:xfrm>
+      </p:grpSpPr>
       <p:sp>
         <p:nvSpPr>
           <p:cNvPr id="2" name="TextBox 1"/>
@@ -7782,6 +10148,7 @@
           <a:lstStyle/>
           <a:p>
             <a:pPr algn="ctr"/>
+            <a:endParaRPr/>
           </a:p>
         </p:txBody>
       </p:sp>
@@ -7971,7 +10338,7 @@
           </a:fontRef>
         </p:style>
         <p:txBody>
-          <a:bodyPr rtlCol="0" anchor="ctr" wrap="square" lIns="101600" tIns="76200"/>
+          <a:bodyPr wrap="square" lIns="101600" tIns="76200" rtlCol="0" anchor="ctr"/>
           <a:lstStyle/>
           <a:p>
             <a:pPr algn="ctr">
@@ -8030,6 +10397,7 @@
           <a:lstStyle/>
           <a:p>
             <a:pPr algn="ctr"/>
+            <a:endParaRPr/>
           </a:p>
         </p:txBody>
       </p:sp>
@@ -8223,7 +10591,7 @@
           </a:fontRef>
         </p:style>
         <p:txBody>
-          <a:bodyPr rtlCol="0" anchor="ctr" wrap="square" lIns="101600" tIns="76200"/>
+          <a:bodyPr wrap="square" lIns="101600" tIns="76200" rtlCol="0" anchor="ctr"/>
           <a:lstStyle/>
           <a:p>
             <a:pPr algn="ctr">
@@ -8321,6 +10689,7 @@
           <a:lstStyle/>
           <a:p>
             <a:pPr algn="ctr"/>
+            <a:endParaRPr/>
           </a:p>
         </p:txBody>
       </p:sp>
@@ -8510,7 +10879,7 @@
           </a:fontRef>
         </p:style>
         <p:txBody>
-          <a:bodyPr rtlCol="0" anchor="ctr" wrap="square" lIns="101600" tIns="76200"/>
+          <a:bodyPr wrap="square" lIns="101600" tIns="76200" rtlCol="0" anchor="ctr"/>
           <a:lstStyle/>
           <a:p>
             <a:pPr algn="ctr">
@@ -8608,6 +10977,7 @@
           <a:lstStyle/>
           <a:p>
             <a:pPr algn="ctr"/>
+            <a:endParaRPr/>
           </a:p>
         </p:txBody>
       </p:sp>
@@ -8801,7 +11171,7 @@
           </a:fontRef>
         </p:style>
         <p:txBody>
-          <a:bodyPr rtlCol="0" anchor="ctr" wrap="square" lIns="101600" tIns="76200"/>
+          <a:bodyPr wrap="square" lIns="101600" tIns="76200" rtlCol="0" anchor="ctr"/>
           <a:lstStyle/>
           <a:p>
             <a:pPr algn="ctr">
@@ -8866,7 +11236,7 @@
 </file>
 
 <file path=ppt/slides/slide8.xml><?xml version="1.0" encoding="utf-8"?>
-<p:sld xmlns:a="http://schemas.openxmlformats.org/drawingml/2006/main" xmlns:p="http://schemas.openxmlformats.org/presentationml/2006/main" xmlns:r="http://schemas.openxmlformats.org/officeDocument/2006/relationships">
+<p:sld xmlns:a="http://schemas.openxmlformats.org/drawingml/2006/main" xmlns:r="http://schemas.openxmlformats.org/officeDocument/2006/relationships" xmlns:p="http://schemas.openxmlformats.org/presentationml/2006/main">
   <p:cSld>
     <p:bg>
       <p:bgPr>
@@ -8882,7 +11252,14 @@
         <p:cNvGrpSpPr/>
         <p:nvPr/>
       </p:nvGrpSpPr>
-      <p:grpSpPr/>
+      <p:grpSpPr>
+        <a:xfrm>
+          <a:off x="0" y="0"/>
+          <a:ext cx="0" cy="0"/>
+          <a:chOff x="0" y="0"/>
+          <a:chExt cx="0" cy="0"/>
+        </a:xfrm>
+      </p:grpSpPr>
       <p:sp>
         <p:nvSpPr>
           <p:cNvPr id="2" name="TextBox 1"/>
@@ -8961,6 +11338,7 @@
           <a:lstStyle/>
           <a:p>
             <a:pPr algn="ctr"/>
+            <a:endParaRPr/>
           </a:p>
         </p:txBody>
       </p:sp>
@@ -9130,6 +11508,7 @@
           <a:lstStyle/>
           <a:p>
             <a:pPr algn="ctr"/>
+            <a:endParaRPr/>
           </a:p>
         </p:txBody>
       </p:sp>
@@ -9299,6 +11678,7 @@
           <a:lstStyle/>
           <a:p>
             <a:pPr algn="ctr"/>
+            <a:endParaRPr/>
           </a:p>
         </p:txBody>
       </p:sp>
@@ -9468,6 +11848,7 @@
           <a:lstStyle/>
           <a:p>
             <a:pPr algn="ctr"/>
+            <a:endParaRPr/>
           </a:p>
         </p:txBody>
       </p:sp>
@@ -9637,6 +12018,7 @@
           <a:lstStyle/>
           <a:p>
             <a:pPr algn="ctr"/>
+            <a:endParaRPr/>
           </a:p>
         </p:txBody>
       </p:sp>
@@ -9773,7 +12155,7 @@
 </file>
 
 <file path=ppt/slides/slide9.xml><?xml version="1.0" encoding="utf-8"?>
-<p:sld xmlns:a="http://schemas.openxmlformats.org/drawingml/2006/main" xmlns:p="http://schemas.openxmlformats.org/presentationml/2006/main" xmlns:r="http://schemas.openxmlformats.org/officeDocument/2006/relationships">
+<p:sld xmlns:a="http://schemas.openxmlformats.org/drawingml/2006/main" xmlns:r="http://schemas.openxmlformats.org/officeDocument/2006/relationships" xmlns:p="http://schemas.openxmlformats.org/presentationml/2006/main">
   <p:cSld>
     <p:bg>
       <p:bgPr>
@@ -9789,7 +12171,14 @@
         <p:cNvGrpSpPr/>
         <p:nvPr/>
       </p:nvGrpSpPr>
-      <p:grpSpPr/>
+      <p:grpSpPr>
+        <a:xfrm>
+          <a:off x="0" y="0"/>
+          <a:ext cx="0" cy="0"/>
+          <a:chOff x="0" y="0"/>
+          <a:chExt cx="0" cy="0"/>
+        </a:xfrm>
+      </p:grpSpPr>
       <p:sp>
         <p:nvSpPr>
           <p:cNvPr id="2" name="Rounded Rectangle 1"/>
@@ -9830,6 +12219,7 @@
           <a:lstStyle/>
           <a:p>
             <a:pPr algn="ctr"/>
+            <a:endParaRPr/>
           </a:p>
         </p:txBody>
       </p:sp>
@@ -10267,4 +12657,325 @@
   </a:objectDefaults>
   <a:extraClrSchemeLst/>
 </a:theme>
+</file>
+
+<file path=ppt/theme/theme2.xml><?xml version="1.0" encoding="utf-8"?>
+<a:theme xmlns:a="http://schemas.openxmlformats.org/drawingml/2006/main" name="Office Theme">
+  <a:themeElements>
+    <a:clrScheme name="Office">
+      <a:dk1>
+        <a:sysClr val="windowText" lastClr="000000"/>
+      </a:dk1>
+      <a:lt1>
+        <a:sysClr val="window" lastClr="FFFFFF"/>
+      </a:lt1>
+      <a:dk2>
+        <a:srgbClr val="0E2841"/>
+      </a:dk2>
+      <a:lt2>
+        <a:srgbClr val="E8E8E8"/>
+      </a:lt2>
+      <a:accent1>
+        <a:srgbClr val="156082"/>
+      </a:accent1>
+      <a:accent2>
+        <a:srgbClr val="E97132"/>
+      </a:accent2>
+      <a:accent3>
+        <a:srgbClr val="196B24"/>
+      </a:accent3>
+      <a:accent4>
+        <a:srgbClr val="0F9ED5"/>
+      </a:accent4>
+      <a:accent5>
+        <a:srgbClr val="A02B93"/>
+      </a:accent5>
+      <a:accent6>
+        <a:srgbClr val="4EA72E"/>
+      </a:accent6>
+      <a:hlink>
+        <a:srgbClr val="467886"/>
+      </a:hlink>
+      <a:folHlink>
+        <a:srgbClr val="96607D"/>
+      </a:folHlink>
+    </a:clrScheme>
+    <a:fontScheme name="Office">
+      <a:majorFont>
+        <a:latin typeface="Aptos Display" panose="02110004020202020204"/>
+        <a:ea typeface=""/>
+        <a:cs typeface=""/>
+        <a:font script="Jpan" typeface="游ゴシック Light"/>
+        <a:font script="Hang" typeface="맑은 고딕"/>
+        <a:font script="Hans" typeface="等线 Light"/>
+        <a:font script="Hant" typeface="新細明體"/>
+        <a:font script="Arab" typeface="Times New Roman"/>
+        <a:font script="Hebr" typeface="Times New Roman"/>
+        <a:font script="Thai" typeface="Angsana New"/>
+        <a:font script="Ethi" typeface="Nyala"/>
+        <a:font script="Beng" typeface="Vrinda"/>
+        <a:font script="Gujr" typeface="Shruti"/>
+        <a:font script="Khmr" typeface="MoolBoran"/>
+        <a:font script="Knda" typeface="Tunga"/>
+        <a:font script="Guru" typeface="Raavi"/>
+        <a:font script="Cans" typeface="Euphemia"/>
+        <a:font script="Cher" typeface="Plantagenet Cherokee"/>
+        <a:font script="Yiii" typeface="Microsoft Yi Baiti"/>
+        <a:font script="Tibt" typeface="Microsoft Himalaya"/>
+        <a:font script="Thaa" typeface="MV Boli"/>
+        <a:font script="Deva" typeface="Mangal"/>
+        <a:font script="Telu" typeface="Gautami"/>
+        <a:font script="Taml" typeface="Latha"/>
+        <a:font script="Syrc" typeface="Estrangelo Edessa"/>
+        <a:font script="Orya" typeface="Kalinga"/>
+        <a:font script="Mlym" typeface="Kartika"/>
+        <a:font script="Laoo" typeface="DokChampa"/>
+        <a:font script="Sinh" typeface="Iskoola Pota"/>
+        <a:font script="Mong" typeface="Mongolian Baiti"/>
+        <a:font script="Viet" typeface="Times New Roman"/>
+        <a:font script="Uigh" typeface="Microsoft Uighur"/>
+        <a:font script="Geor" typeface="Sylfaen"/>
+        <a:font script="Armn" typeface="Arial"/>
+        <a:font script="Bugi" typeface="Leelawadee UI"/>
+        <a:font script="Bopo" typeface="Microsoft JhengHei"/>
+        <a:font script="Java" typeface="Javanese Text"/>
+        <a:font script="Lisu" typeface="Segoe UI"/>
+        <a:font script="Mymr" typeface="Myanmar Text"/>
+        <a:font script="Nkoo" typeface="Ebrima"/>
+        <a:font script="Olck" typeface="Nirmala UI"/>
+        <a:font script="Osma" typeface="Ebrima"/>
+        <a:font script="Phag" typeface="Phagspa"/>
+        <a:font script="Syrn" typeface="Estrangelo Edessa"/>
+        <a:font script="Syrj" typeface="Estrangelo Edessa"/>
+        <a:font script="Syre" typeface="Estrangelo Edessa"/>
+        <a:font script="Sora" typeface="Nirmala UI"/>
+        <a:font script="Tale" typeface="Microsoft Tai Le"/>
+        <a:font script="Talu" typeface="Microsoft New Tai Lue"/>
+        <a:font script="Tfng" typeface="Ebrima"/>
+      </a:majorFont>
+      <a:minorFont>
+        <a:latin typeface="Aptos" panose="02110004020202020204"/>
+        <a:ea typeface=""/>
+        <a:cs typeface=""/>
+        <a:font script="Jpan" typeface="游ゴシック"/>
+        <a:font script="Hang" typeface="맑은 고딕"/>
+        <a:font script="Hans" typeface="等线"/>
+        <a:font script="Hant" typeface="新細明體"/>
+        <a:font script="Arab" typeface="Arial"/>
+        <a:font script="Hebr" typeface="Arial"/>
+        <a:font script="Thai" typeface="Cordia New"/>
+        <a:font script="Ethi" typeface="Nyala"/>
+        <a:font script="Beng" typeface="Vrinda"/>
+        <a:font script="Gujr" typeface="Shruti"/>
+        <a:font script="Khmr" typeface="DaunPenh"/>
+        <a:font script="Knda" typeface="Tunga"/>
+        <a:font script="Guru" typeface="Raavi"/>
+        <a:font script="Cans" typeface="Euphemia"/>
+        <a:font script="Cher" typeface="Plantagenet Cherokee"/>
+        <a:font script="Yiii" typeface="Microsoft Yi Baiti"/>
+        <a:font script="Tibt" typeface="Microsoft Himalaya"/>
+        <a:font script="Thaa" typeface="MV Boli"/>
+        <a:font script="Deva" typeface="Mangal"/>
+        <a:font script="Telu" typeface="Gautami"/>
+        <a:font script="Taml" typeface="Latha"/>
+        <a:font script="Syrc" typeface="Estrangelo Edessa"/>
+        <a:font script="Orya" typeface="Kalinga"/>
+        <a:font script="Mlym" typeface="Kartika"/>
+        <a:font script="Laoo" typeface="DokChampa"/>
+        <a:font script="Sinh" typeface="Iskoola Pota"/>
+        <a:font script="Mong" typeface="Mongolian Baiti"/>
+        <a:font script="Viet" typeface="Arial"/>
+        <a:font script="Uigh" typeface="Microsoft Uighur"/>
+        <a:font script="Geor" typeface="Sylfaen"/>
+        <a:font script="Armn" typeface="Arial"/>
+        <a:font script="Bugi" typeface="Leelawadee UI"/>
+        <a:font script="Bopo" typeface="Microsoft JhengHei"/>
+        <a:font script="Java" typeface="Javanese Text"/>
+        <a:font script="Lisu" typeface="Segoe UI"/>
+        <a:font script="Mymr" typeface="Myanmar Text"/>
+        <a:font script="Nkoo" typeface="Ebrima"/>
+        <a:font script="Olck" typeface="Nirmala UI"/>
+        <a:font script="Osma" typeface="Ebrima"/>
+        <a:font script="Phag" typeface="Phagspa"/>
+        <a:font script="Syrn" typeface="Estrangelo Edessa"/>
+        <a:font script="Syrj" typeface="Estrangelo Edessa"/>
+        <a:font script="Syre" typeface="Estrangelo Edessa"/>
+        <a:font script="Sora" typeface="Nirmala UI"/>
+        <a:font script="Tale" typeface="Microsoft Tai Le"/>
+        <a:font script="Talu" typeface="Microsoft New Tai Lue"/>
+        <a:font script="Tfng" typeface="Ebrima"/>
+      </a:minorFont>
+    </a:fontScheme>
+    <a:fmtScheme name="Office">
+      <a:fillStyleLst>
+        <a:solidFill>
+          <a:schemeClr val="phClr"/>
+        </a:solidFill>
+        <a:gradFill rotWithShape="1">
+          <a:gsLst>
+            <a:gs pos="0">
+              <a:schemeClr val="phClr">
+                <a:lumMod val="110000"/>
+                <a:satMod val="105000"/>
+                <a:tint val="67000"/>
+              </a:schemeClr>
+            </a:gs>
+            <a:gs pos="50000">
+              <a:schemeClr val="phClr">
+                <a:lumMod val="105000"/>
+                <a:satMod val="103000"/>
+                <a:tint val="73000"/>
+              </a:schemeClr>
+            </a:gs>
+            <a:gs pos="100000">
+              <a:schemeClr val="phClr">
+                <a:lumMod val="105000"/>
+                <a:satMod val="109000"/>
+                <a:tint val="81000"/>
+              </a:schemeClr>
+            </a:gs>
+          </a:gsLst>
+          <a:lin ang="5400000" scaled="0"/>
+        </a:gradFill>
+        <a:gradFill rotWithShape="1">
+          <a:gsLst>
+            <a:gs pos="0">
+              <a:schemeClr val="phClr">
+                <a:satMod val="103000"/>
+                <a:lumMod val="102000"/>
+                <a:tint val="94000"/>
+              </a:schemeClr>
+            </a:gs>
+            <a:gs pos="50000">
+              <a:schemeClr val="phClr">
+                <a:satMod val="110000"/>
+                <a:lumMod val="100000"/>
+                <a:shade val="100000"/>
+              </a:schemeClr>
+            </a:gs>
+            <a:gs pos="100000">
+              <a:schemeClr val="phClr">
+                <a:lumMod val="99000"/>
+                <a:satMod val="120000"/>
+                <a:shade val="78000"/>
+              </a:schemeClr>
+            </a:gs>
+          </a:gsLst>
+          <a:lin ang="5400000" scaled="0"/>
+        </a:gradFill>
+      </a:fillStyleLst>
+      <a:lnStyleLst>
+        <a:ln w="12700" cap="flat" cmpd="sng" algn="ctr">
+          <a:solidFill>
+            <a:schemeClr val="phClr"/>
+          </a:solidFill>
+          <a:prstDash val="solid"/>
+          <a:miter lim="800000"/>
+        </a:ln>
+        <a:ln w="19050" cap="flat" cmpd="sng" algn="ctr">
+          <a:solidFill>
+            <a:schemeClr val="phClr"/>
+          </a:solidFill>
+          <a:prstDash val="solid"/>
+          <a:miter lim="800000"/>
+        </a:ln>
+        <a:ln w="25400" cap="flat" cmpd="sng" algn="ctr">
+          <a:solidFill>
+            <a:schemeClr val="phClr"/>
+          </a:solidFill>
+          <a:prstDash val="solid"/>
+          <a:miter lim="800000"/>
+        </a:ln>
+      </a:lnStyleLst>
+      <a:effectStyleLst>
+        <a:effectStyle>
+          <a:effectLst/>
+        </a:effectStyle>
+        <a:effectStyle>
+          <a:effectLst/>
+        </a:effectStyle>
+        <a:effectStyle>
+          <a:effectLst>
+            <a:outerShdw blurRad="57150" dist="19050" dir="5400000" algn="ctr" rotWithShape="0">
+              <a:srgbClr val="000000">
+                <a:alpha val="63000"/>
+              </a:srgbClr>
+            </a:outerShdw>
+          </a:effectLst>
+        </a:effectStyle>
+      </a:effectStyleLst>
+      <a:bgFillStyleLst>
+        <a:solidFill>
+          <a:schemeClr val="phClr"/>
+        </a:solidFill>
+        <a:solidFill>
+          <a:schemeClr val="phClr">
+            <a:tint val="95000"/>
+            <a:satMod val="170000"/>
+          </a:schemeClr>
+        </a:solidFill>
+        <a:gradFill rotWithShape="1">
+          <a:gsLst>
+            <a:gs pos="0">
+              <a:schemeClr val="phClr">
+                <a:tint val="93000"/>
+                <a:satMod val="150000"/>
+                <a:shade val="98000"/>
+                <a:lumMod val="102000"/>
+              </a:schemeClr>
+            </a:gs>
+            <a:gs pos="50000">
+              <a:schemeClr val="phClr">
+                <a:tint val="98000"/>
+                <a:satMod val="130000"/>
+                <a:shade val="90000"/>
+                <a:lumMod val="103000"/>
+              </a:schemeClr>
+            </a:gs>
+            <a:gs pos="100000">
+              <a:schemeClr val="phClr">
+                <a:shade val="63000"/>
+                <a:satMod val="120000"/>
+              </a:schemeClr>
+            </a:gs>
+          </a:gsLst>
+          <a:lin ang="5400000" scaled="0"/>
+        </a:gradFill>
+      </a:bgFillStyleLst>
+    </a:fmtScheme>
+  </a:themeElements>
+  <a:objectDefaults>
+    <a:lnDef>
+      <a:spPr/>
+      <a:bodyPr/>
+      <a:lstStyle/>
+      <a:style>
+        <a:lnRef idx="2">
+          <a:schemeClr val="accent1"/>
+        </a:lnRef>
+        <a:fillRef idx="0">
+          <a:schemeClr val="accent1"/>
+        </a:fillRef>
+        <a:effectRef idx="1">
+          <a:schemeClr val="accent1"/>
+        </a:effectRef>
+        <a:fontRef idx="minor">
+          <a:schemeClr val="tx1"/>
+        </a:fontRef>
+      </a:style>
+    </a:lnDef>
+  </a:objectDefaults>
+  <a:extraClrSchemeLst/>
+  <a:extLst>
+    <a:ext uri="{05A4C25C-085E-4340-85A3-A5531E510DB2}">
+      <thm15:themeFamily xmlns:thm15="http://schemas.microsoft.com/office/thememl/2012/main" name="Office Theme" id="{2E142A2C-CD16-42D6-873A-C26D2A0506FA}" vid="{1BDDFF52-6CD6-40A5-AB3C-68EB2F1E4D0A}"/>
+    </a:ext>
+  </a:extLst>
+</a:theme>
+</file>
+
+<file path=docMetadata/LabelInfo.xml><?xml version="1.0" encoding="utf-8"?>
+<clbl:labelList xmlns:clbl="http://schemas.microsoft.com/office/2020/mipLabelMetadata">
+  <clbl:label id="{ea60d57e-af5b-4752-ac57-3e4f28ca11dc}" enabled="1" method="Standard" siteId="{36da45f1-dd2c-4d1f-af13-5abe46b99921}" contentBits="0" removed="0"/>
+</clbl:labelList>
 </file>
--- a/RAG_Pipeline_Explained.pptx
+++ b/RAG_Pipeline_Explained.pptx
@@ -5,7 +5,7 @@
     <p:sldMasterId id="2147483648" r:id="rId1"/>
   </p:sldMasterIdLst>
   <p:notesMasterIdLst>
-    <p:notesMasterId r:id="rId11"/>
+    <p:notesMasterId r:id="rId12"/>
   </p:notesMasterIdLst>
   <p:sldIdLst>
     <p:sldId id="256" r:id="rId2"/>
@@ -16,8 +16,8 @@
     <p:sldId id="261" r:id="rId7"/>
     <p:sldId id="262" r:id="rId8"/>
     <p:sldId id="263" r:id="rId9"/>
-    <p:sldId id="265" r:id="rId16"/>
-    <p:sldId id="264" r:id="rId10"/>
+    <p:sldId id="265" r:id="rId10"/>
+    <p:sldId id="264" r:id="rId11"/>
   </p:sldIdLst>
   <p:sldSz cx="12188825" cy="6858000"/>
   <p:notesSz cx="6858000" cy="9144000"/>
@@ -5264,36 +5264,49 @@
 </file>
 
 <file path=ppt/slides/slide10.xml><?xml version="1.0" encoding="utf-8"?>
-<p:sld xmlns:a="http://schemas.openxmlformats.org/drawingml/2006/main" xmlns:p="http://schemas.openxmlformats.org/presentationml/2006/main" xmlns:r="http://schemas.openxmlformats.org/officeDocument/2006/relationships">
+<p:sld xmlns:a="http://schemas.openxmlformats.org/drawingml/2006/main" xmlns:r="http://schemas.openxmlformats.org/officeDocument/2006/relationships" xmlns:p="http://schemas.openxmlformats.org/presentationml/2006/main">
   <p:cSld>
+    <p:bg>
+      <p:bgPr>
+        <a:solidFill>
+          <a:srgbClr val="0F1117"/>
+        </a:solidFill>
+        <a:effectLst/>
+      </p:bgPr>
+    </p:bg>
     <p:spTree>
       <p:nvGrpSpPr>
         <p:cNvPr id="1" name=""/>
         <p:cNvGrpSpPr/>
         <p:nvPr/>
       </p:nvGrpSpPr>
-      <p:grpSpPr/>
-      <p:sp>
-        <p:nvSpPr>
-          <p:cNvPr id="2" name="Rectangle 1"/>
+      <p:grpSpPr>
+        <a:xfrm>
+          <a:off x="0" y="0"/>
+          <a:ext cx="0" cy="0"/>
+          <a:chOff x="0" y="0"/>
+          <a:chExt cx="0" cy="0"/>
+        </a:xfrm>
+      </p:grpSpPr>
+      <p:sp>
+        <p:nvSpPr>
+          <p:cNvPr id="2" name="Rounded Rectangle 1"/>
           <p:cNvSpPr/>
           <p:nvPr/>
         </p:nvSpPr>
         <p:spPr>
           <a:xfrm>
-            <a:off x="0" y="0"/>
-            <a:ext cx="9144000" cy="5143500"/>
-          </a:xfrm>
-          <a:prstGeom prst="rect">
+            <a:off x="5029200" y="3017520"/>
+            <a:ext cx="2130552" cy="54864"/>
+          </a:xfrm>
+          <a:prstGeom prst="roundRect">
             <a:avLst/>
           </a:prstGeom>
           <a:solidFill>
-            <a:srgbClr val="0F1117"/>
+            <a:srgbClr val="818CF8"/>
           </a:solidFill>
           <a:ln>
-            <a:solidFill>
-              <a:srgbClr val="0F1117"/>
-            </a:solidFill>
+            <a:noFill/>
           </a:ln>
         </p:spPr>
         <p:style>
@@ -5315,6 +5328,7 @@
           <a:lstStyle/>
           <a:p>
             <a:pPr algn="ctr"/>
+            <a:endParaRPr/>
           </a:p>
         </p:txBody>
       </p:sp>
@@ -5326,135 +5340,8 @@
         </p:nvSpPr>
         <p:spPr>
           <a:xfrm>
-            <a:off x="457200" y="365760"/>
-            <a:ext cx="8229600" cy="731520"/>
-          </a:xfrm>
-          <a:prstGeom prst="rect">
-            <a:avLst/>
-          </a:prstGeom>
-          <a:noFill/>
-        </p:spPr>
-        <p:txBody>
-          <a:bodyPr wrap="none">
-            <a:spAutoFit/>
-          </a:bodyPr>
-          <a:lstStyle/>
-          <a:p>
-            <a:pPr>
-              <a:defRPr sz="3200" b="1">
-                <a:solidFill>
-                  <a:srgbClr val="FFFFFF"/>
-                </a:solidFill>
-              </a:defRPr>
-            </a:pPr>
-            <a:r>
-              <a:t>Chunking Strategies</a:t>
-            </a:r>
-          </a:p>
-        </p:txBody>
-      </p:sp>
-      <p:sp>
-        <p:nvSpPr>
-          <p:cNvPr id="4" name="Rounded Rectangle 3"/>
-          <p:cNvSpPr/>
-          <p:nvPr/>
-        </p:nvSpPr>
-        <p:spPr>
-          <a:xfrm>
-            <a:off x="457200" y="1097280"/>
-            <a:ext cx="3931920" cy="3474720"/>
-          </a:xfrm>
-          <a:prstGeom prst="roundRect">
-            <a:avLst/>
-          </a:prstGeom>
-          <a:solidFill>
-            <a:srgbClr val="1A1E2B"/>
-          </a:solidFill>
-          <a:ln>
-            <a:solidFill>
-              <a:srgbClr val="818CF8"/>
-            </a:solidFill>
-          </a:ln>
-        </p:spPr>
-        <p:style>
-          <a:lnRef idx="1">
-            <a:schemeClr val="accent1"/>
-          </a:lnRef>
-          <a:fillRef idx="3">
-            <a:schemeClr val="accent1"/>
-          </a:fillRef>
-          <a:effectRef idx="2">
-            <a:schemeClr val="accent1"/>
-          </a:effectRef>
-          <a:fontRef idx="minor">
-            <a:schemeClr val="lt1"/>
-          </a:fontRef>
-        </p:style>
-        <p:txBody>
-          <a:bodyPr rtlCol="0" anchor="ctr"/>
-          <a:lstStyle/>
-          <a:p>
-            <a:pPr algn="ctr"/>
-          </a:p>
-        </p:txBody>
-      </p:sp>
-      <p:sp>
-        <p:nvSpPr>
-          <p:cNvPr id="5" name="TextBox 4"/>
-          <p:cNvSpPr txBox="1"/>
-          <p:nvPr/>
-        </p:nvSpPr>
-        <p:spPr>
-          <a:xfrm>
-            <a:off x="548640" y="1188720"/>
-            <a:ext cx="3749039" cy="457200"/>
-          </a:xfrm>
-          <a:prstGeom prst="rect">
-            <a:avLst/>
-          </a:prstGeom>
-          <a:noFill/>
-        </p:spPr>
-        <p:txBody>
-          <a:bodyPr wrap="none">
-            <a:spAutoFit/>
-          </a:bodyPr>
-          <a:lstStyle/>
-          <a:p>
-            <a:pPr>
-              <a:defRPr sz="2000" b="1">
-                <a:solidFill>
-                  <a:srgbClr val="818CF8"/>
-                </a:solidFill>
-              </a:defRPr>
-            </a:pPr>
-            <a:r>
-              <a:t>Current method</a:t>
-            </a:r>
-          </a:p>
-          <a:p>
-            <a:pPr>
-              <a:defRPr sz="1600" b="1">
-                <a:solidFill>
-                  <a:srgbClr val="FFFFFF"/>
-                </a:solidFill>
-              </a:defRPr>
-            </a:pPr>
-            <a:r>
-              <a:t>Split by Newlines/Paragraphs</a:t>
-            </a:r>
-          </a:p>
-        </p:txBody>
-      </p:sp>
-      <p:sp>
-        <p:nvSpPr>
-          <p:cNvPr id="6" name="TextBox 5"/>
-          <p:cNvSpPr txBox="1"/>
-          <p:nvPr/>
-        </p:nvSpPr>
-        <p:spPr>
-          <a:xfrm>
-            <a:off x="548640" y="1828800"/>
-            <a:ext cx="3749039" cy="2560320"/>
+            <a:off x="914400" y="1828800"/>
+            <a:ext cx="10360152" cy="914400"/>
           </a:xfrm>
           <a:prstGeom prst="rect">
             <a:avLst/>
@@ -5467,180 +5354,30 @@
           </a:bodyPr>
           <a:lstStyle/>
           <a:p>
-            <a:pPr>
-              <a:defRPr sz="1400">
-                <a:solidFill>
-                  <a:srgbClr val="C8C8C8"/>
-                </a:solidFill>
-                <a:latin typeface="Courier New"/>
-              </a:defRPr>
-            </a:pPr>
-            <a:r>
-              <a:t>Code:</a:t>
-            </a:r>
-            <a:br/>
-            <a:r>
-              <a:t>chunks = text.split("\n")</a:t>
-            </a:r>
-          </a:p>
-          <a:p>
-            <a:br/>
-            <a:pPr>
-              <a:defRPr sz="1600" b="1">
-                <a:solidFill>
-                  <a:srgbClr val="34D399"/>
-                </a:solidFill>
-              </a:defRPr>
-            </a:pPr>
-            <a:r>
-              <a:t>✓ Pros:</a:t>
-            </a:r>
-          </a:p>
-          <a:p>
-            <a:pPr>
-              <a:defRPr sz="1400">
-                <a:solidFill>
-                  <a:srgbClr val="DCDCDC"/>
-                </a:solidFill>
-              </a:defRPr>
-            </a:pPr>
-            <a:r>
-              <a:t>  • Simple &amp; fast</a:t>
-            </a:r>
-            <a:br/>
-            <a:r>
-              <a:t>  • Preserves context</a:t>
-            </a:r>
-            <a:br/>
-            <a:r>
-              <a:t>  • No overlap needed</a:t>
-            </a:r>
-          </a:p>
-          <a:p>
-            <a:br/>
-            <a:pPr>
-              <a:defRPr sz="1600" b="1">
-                <a:solidFill>
-                  <a:srgbClr val="FD79A8"/>
-                </a:solidFill>
-              </a:defRPr>
-            </a:pPr>
-            <a:r>
-              <a:t>✗ Cons:</a:t>
-            </a:r>
-          </a:p>
-          <a:p>
-            <a:pPr>
-              <a:defRPr sz="1400">
-                <a:solidFill>
-                  <a:srgbClr val="DCDCDC"/>
-                </a:solidFill>
-              </a:defRPr>
-            </a:pPr>
-            <a:r>
-              <a:t>  • Unequal chunk sizes</a:t>
-            </a:r>
-            <a:br/>
-            <a:r>
-              <a:t>  • May lose meaning if short</a:t>
-            </a:r>
-            <a:br/>
-            <a:r>
-              <a:t>  • Paragraph-dependent</a:t>
-            </a:r>
-          </a:p>
-        </p:txBody>
-      </p:sp>
-      <p:sp>
-        <p:nvSpPr>
-          <p:cNvPr id="7" name="TextBox 6"/>
+            <a:pPr algn="ctr">
+              <a:defRPr sz="4800" b="1">
+                <a:solidFill>
+                  <a:srgbClr val="E2E4EA"/>
+                </a:solidFill>
+                <a:latin typeface="Calibri"/>
+              </a:defRPr>
+            </a:pPr>
+            <a:r>
+              <a:t>Thank You! 🎯</a:t>
+            </a:r>
+          </a:p>
+        </p:txBody>
+      </p:sp>
+      <p:sp>
+        <p:nvSpPr>
+          <p:cNvPr id="4" name="TextBox 3"/>
           <p:cNvSpPr txBox="1"/>
           <p:nvPr/>
         </p:nvSpPr>
         <p:spPr>
           <a:xfrm>
-            <a:off x="4572000" y="1188720"/>
-            <a:ext cx="4114800" cy="457200"/>
-          </a:xfrm>
-          <a:prstGeom prst="rect">
-            <a:avLst/>
-          </a:prstGeom>
-          <a:noFill/>
-        </p:spPr>
-        <p:txBody>
-          <a:bodyPr wrap="none">
-            <a:spAutoFit/>
-          </a:bodyPr>
-          <a:lstStyle/>
-          <a:p>
-            <a:pPr>
-              <a:defRPr sz="2000" b="1">
-                <a:solidFill>
-                  <a:srgbClr val="FDCB6E"/>
-                </a:solidFill>
-              </a:defRPr>
-            </a:pPr>
-            <a:r>
-              <a:t>Alternative methods</a:t>
-            </a:r>
-          </a:p>
-        </p:txBody>
-      </p:sp>
-      <p:sp>
-        <p:nvSpPr>
-          <p:cNvPr id="8" name="Rounded Rectangle 7"/>
-          <p:cNvSpPr/>
-          <p:nvPr/>
-        </p:nvSpPr>
-        <p:spPr>
-          <a:xfrm>
-            <a:off x="4572000" y="1645920"/>
-            <a:ext cx="4114800" cy="2926080"/>
-          </a:xfrm>
-          <a:prstGeom prst="roundRect">
-            <a:avLst/>
-          </a:prstGeom>
-          <a:solidFill>
-            <a:srgbClr val="1A1E2B"/>
-          </a:solidFill>
-          <a:ln>
-            <a:solidFill>
-              <a:srgbClr val="FDCB6E"/>
-            </a:solidFill>
-          </a:ln>
-        </p:spPr>
-        <p:style>
-          <a:lnRef idx="1">
-            <a:schemeClr val="accent1"/>
-          </a:lnRef>
-          <a:fillRef idx="3">
-            <a:schemeClr val="accent1"/>
-          </a:fillRef>
-          <a:effectRef idx="2">
-            <a:schemeClr val="accent1"/>
-          </a:effectRef>
-          <a:fontRef idx="minor">
-            <a:schemeClr val="lt1"/>
-          </a:fontRef>
-        </p:style>
-        <p:txBody>
-          <a:bodyPr rtlCol="0" anchor="ctr"/>
-          <a:lstStyle/>
-          <a:p>
-            <a:pPr algn="ctr"/>
-          </a:p>
-        </p:txBody>
-      </p:sp>
-      <p:sp>
-        <p:nvSpPr>
-          <p:cNvPr id="9" name="TextBox 8"/>
-          <p:cNvSpPr txBox="1"/>
-          <p:nvPr/>
-        </p:nvSpPr>
-        <p:spPr>
-          <a:xfrm>
-            <a:off x="4663440" y="1737360"/>
-            <a:ext cx="3931920" cy="2743200"/>
+            <a:off x="914400" y="3291840"/>
+            <a:ext cx="10360152" cy="548640"/>
           </a:xfrm>
           <a:prstGeom prst="rect">
             <a:avLst/>
@@ -5653,130 +5390,52 @@
           </a:bodyPr>
           <a:lstStyle/>
           <a:p>
-            <a:pPr>
-              <a:defRPr b="1" sz="1400">
-                <a:solidFill>
-                  <a:srgbClr val="FFFFFF"/>
-                </a:solidFill>
-              </a:defRPr>
-            </a:pPr>
-            <a:r>
-              <a:t>1️⃣ Fixed Size</a:t>
-            </a:r>
-          </a:p>
-          <a:p>
-            <a:pPr>
-              <a:defRPr sz="1200">
-                <a:solidFill>
-                  <a:srgbClr val="C8C8C8"/>
-                </a:solidFill>
-              </a:defRPr>
-            </a:pPr>
-            <a:r>
-              <a:t>  • Split by word count (e.g., 256 words)</a:t>
-            </a:r>
-            <a:br/>
-            <a:r>
-              <a:t>  • Consistent but may cut mid-sentence</a:t>
-            </a:r>
-          </a:p>
-          <a:p>
-            <a:pPr>
-              <a:defRPr sz="400"/>
-            </a:pPr>
-          </a:p>
-          <a:p>
-            <a:pPr>
-              <a:defRPr b="1" sz="1400">
-                <a:solidFill>
-                  <a:srgbClr val="FFFFFF"/>
-                </a:solidFill>
-              </a:defRPr>
-            </a:pPr>
-            <a:r>
-              <a:t>2️⃣ Semantic Chunking</a:t>
-            </a:r>
-          </a:p>
-          <a:p>
-            <a:pPr>
-              <a:defRPr sz="1200">
-                <a:solidFill>
-                  <a:srgbClr val="C8C8C8"/>
-                </a:solidFill>
-              </a:defRPr>
-            </a:pPr>
-            <a:r>
-              <a:t>  • Break at natural topic boundaries</a:t>
-            </a:r>
-            <a:br/>
-            <a:r>
-              <a:t>  • Requires NLP (spacy, nltk)</a:t>
-            </a:r>
-          </a:p>
-          <a:p>
-            <a:pPr>
-              <a:defRPr sz="400"/>
-            </a:pPr>
-          </a:p>
-          <a:p>
-            <a:pPr>
-              <a:defRPr b="1" sz="1400">
-                <a:solidFill>
-                  <a:srgbClr val="FFFFFF"/>
-                </a:solidFill>
-              </a:defRPr>
-            </a:pPr>
-            <a:r>
-              <a:t>3️⃣ Recursive Chunking</a:t>
-            </a:r>
-          </a:p>
-          <a:p>
-            <a:pPr>
-              <a:defRPr sz="1200">
-                <a:solidFill>
-                  <a:srgbClr val="C8C8C8"/>
-                </a:solidFill>
-              </a:defRPr>
-            </a:pPr>
-            <a:r>
-              <a:t>  • Preserve structure (headers, lists)</a:t>
-            </a:r>
-            <a:br/>
-            <a:r>
-              <a:t>  • Use langchain, tree-sitter</a:t>
-            </a:r>
-          </a:p>
-          <a:p>
-            <a:pPr>
-              <a:defRPr sz="400"/>
-            </a:pPr>
-          </a:p>
-          <a:p>
-            <a:pPr>
-              <a:defRPr b="1" sz="1400">
-                <a:solidFill>
-                  <a:srgbClr val="FFFFFF"/>
-                </a:solidFill>
-              </a:defRPr>
-            </a:pPr>
-            <a:r>
-              <a:t>4️⃣ Sliding Window</a:t>
-            </a:r>
-          </a:p>
-          <a:p>
-            <a:pPr>
-              <a:defRPr sz="1200">
-                <a:solidFill>
-                  <a:srgbClr val="C8C8C8"/>
-                </a:solidFill>
-              </a:defRPr>
-            </a:pPr>
-            <a:r>
-              <a:t>  • Overlapping chunks (e.g., 256 + 50 overlap)</a:t>
-            </a:r>
-            <a:br/>
-            <a:r>
-              <a:t>  • Better context preservation</a:t>
+            <a:pPr algn="ctr">
+              <a:defRPr sz="1800" b="0">
+                <a:solidFill>
+                  <a:srgbClr val="818CF8"/>
+                </a:solidFill>
+                <a:latin typeface="Calibri"/>
+              </a:defRPr>
+            </a:pPr>
+            <a:r>
+              <a:t>Try the live demo at  http://localhost:5050</a:t>
+            </a:r>
+          </a:p>
+        </p:txBody>
+      </p:sp>
+      <p:sp>
+        <p:nvSpPr>
+          <p:cNvPr id="5" name="TextBox 4"/>
+          <p:cNvSpPr txBox="1"/>
+          <p:nvPr/>
+        </p:nvSpPr>
+        <p:spPr>
+          <a:xfrm>
+            <a:off x="914400" y="3931920"/>
+            <a:ext cx="10360152" cy="731520"/>
+          </a:xfrm>
+          <a:prstGeom prst="rect">
+            <a:avLst/>
+          </a:prstGeom>
+          <a:noFill/>
+        </p:spPr>
+        <p:txBody>
+          <a:bodyPr wrap="square">
+            <a:spAutoFit/>
+          </a:bodyPr>
+          <a:lstStyle/>
+          <a:p>
+            <a:pPr algn="ctr">
+              <a:defRPr sz="1400" b="0">
+                <a:solidFill>
+                  <a:srgbClr val="6B7280"/>
+                </a:solidFill>
+                <a:latin typeface="Calibri"/>
+              </a:defRPr>
+            </a:pPr>
+            <a:r>
+              <a:t>GitHub: github.com/bhargavt1997/AG-Rag-Demo</a:t>
             </a:r>
           </a:p>
         </p:txBody>
@@ -12157,14 +11816,6 @@
 <file path=ppt/slides/slide9.xml><?xml version="1.0" encoding="utf-8"?>
 <p:sld xmlns:a="http://schemas.openxmlformats.org/drawingml/2006/main" xmlns:r="http://schemas.openxmlformats.org/officeDocument/2006/relationships" xmlns:p="http://schemas.openxmlformats.org/presentationml/2006/main">
   <p:cSld>
-    <p:bg>
-      <p:bgPr>
-        <a:solidFill>
-          <a:srgbClr val="0F1117"/>
-        </a:solidFill>
-        <a:effectLst/>
-      </p:bgPr>
-    </p:bg>
     <p:spTree>
       <p:nvGrpSpPr>
         <p:cNvPr id="1" name=""/>
@@ -12181,23 +11832,25 @@
       </p:grpSpPr>
       <p:sp>
         <p:nvSpPr>
-          <p:cNvPr id="2" name="Rounded Rectangle 1"/>
+          <p:cNvPr id="2" name="Rectangle 1"/>
           <p:cNvSpPr/>
           <p:nvPr/>
         </p:nvSpPr>
         <p:spPr>
           <a:xfrm>
-            <a:off x="5029200" y="3017520"/>
-            <a:ext cx="2130552" cy="54864"/>
-          </a:xfrm>
-          <a:prstGeom prst="roundRect">
+            <a:off x="0" y="0"/>
+            <a:ext cx="12188825" cy="6858000"/>
+          </a:xfrm>
+          <a:prstGeom prst="rect">
             <a:avLst/>
           </a:prstGeom>
           <a:solidFill>
-            <a:srgbClr val="818CF8"/>
+            <a:srgbClr val="0F1117"/>
           </a:solidFill>
           <a:ln>
-            <a:noFill/>
+            <a:solidFill>
+              <a:srgbClr val="0F1117"/>
+            </a:solidFill>
           </a:ln>
         </p:spPr>
         <p:style>
@@ -12231,8 +11884,138 @@
         </p:nvSpPr>
         <p:spPr>
           <a:xfrm>
-            <a:off x="914400" y="1828800"/>
-            <a:ext cx="10360152" cy="914400"/>
+            <a:off x="457200" y="365760"/>
+            <a:ext cx="8229600" cy="731520"/>
+          </a:xfrm>
+          <a:prstGeom prst="rect">
+            <a:avLst/>
+          </a:prstGeom>
+          <a:noFill/>
+        </p:spPr>
+        <p:txBody>
+          <a:bodyPr wrap="none">
+            <a:spAutoFit/>
+          </a:bodyPr>
+          <a:lstStyle/>
+          <a:p>
+            <a:pPr>
+              <a:defRPr sz="3200" b="1">
+                <a:solidFill>
+                  <a:srgbClr val="FFFFFF"/>
+                </a:solidFill>
+              </a:defRPr>
+            </a:pPr>
+            <a:r>
+              <a:t>Chunking Strategies</a:t>
+            </a:r>
+          </a:p>
+        </p:txBody>
+      </p:sp>
+      <p:sp>
+        <p:nvSpPr>
+          <p:cNvPr id="4" name="Rounded Rectangle 3"/>
+          <p:cNvSpPr/>
+          <p:nvPr/>
+        </p:nvSpPr>
+        <p:spPr>
+          <a:xfrm>
+            <a:off x="457200" y="2286000"/>
+            <a:ext cx="3931920" cy="4023360"/>
+          </a:xfrm>
+          <a:prstGeom prst="roundRect">
+            <a:avLst/>
+          </a:prstGeom>
+          <a:solidFill>
+            <a:srgbClr val="1A1E2B"/>
+          </a:solidFill>
+          <a:ln>
+            <a:solidFill>
+              <a:srgbClr val="818CF8"/>
+            </a:solidFill>
+          </a:ln>
+        </p:spPr>
+        <p:style>
+          <a:lnRef idx="1">
+            <a:schemeClr val="accent1"/>
+          </a:lnRef>
+          <a:fillRef idx="3">
+            <a:schemeClr val="accent1"/>
+          </a:fillRef>
+          <a:effectRef idx="2">
+            <a:schemeClr val="accent1"/>
+          </a:effectRef>
+          <a:fontRef idx="minor">
+            <a:schemeClr val="lt1"/>
+          </a:fontRef>
+        </p:style>
+        <p:txBody>
+          <a:bodyPr rtlCol="0" anchor="ctr"/>
+          <a:lstStyle/>
+          <a:p>
+            <a:pPr algn="ctr"/>
+            <a:endParaRPr/>
+          </a:p>
+        </p:txBody>
+      </p:sp>
+      <p:sp>
+        <p:nvSpPr>
+          <p:cNvPr id="5" name="TextBox 4"/>
+          <p:cNvSpPr txBox="1"/>
+          <p:nvPr/>
+        </p:nvSpPr>
+        <p:spPr>
+          <a:xfrm>
+            <a:off x="548640" y="1188720"/>
+            <a:ext cx="3749039" cy="457200"/>
+          </a:xfrm>
+          <a:prstGeom prst="rect">
+            <a:avLst/>
+          </a:prstGeom>
+          <a:noFill/>
+        </p:spPr>
+        <p:txBody>
+          <a:bodyPr wrap="none">
+            <a:spAutoFit/>
+          </a:bodyPr>
+          <a:lstStyle/>
+          <a:p>
+            <a:pPr>
+              <a:defRPr sz="2000" b="1">
+                <a:solidFill>
+                  <a:srgbClr val="818CF8"/>
+                </a:solidFill>
+              </a:defRPr>
+            </a:pPr>
+            <a:r>
+              <a:rPr dirty="0"/>
+              <a:t>Current method</a:t>
+            </a:r>
+          </a:p>
+          <a:p>
+            <a:pPr>
+              <a:defRPr sz="1600" b="1">
+                <a:solidFill>
+                  <a:srgbClr val="FFFFFF"/>
+                </a:solidFill>
+              </a:defRPr>
+            </a:pPr>
+            <a:r>
+              <a:rPr dirty="0"/>
+              <a:t>Split by Newlines/Paragraphs</a:t>
+            </a:r>
+          </a:p>
+        </p:txBody>
+      </p:sp>
+      <p:sp>
+        <p:nvSpPr>
+          <p:cNvPr id="6" name="TextBox 5"/>
+          <p:cNvSpPr txBox="1"/>
+          <p:nvPr/>
+        </p:nvSpPr>
+        <p:spPr>
+          <a:xfrm>
+            <a:off x="610755" y="2862775"/>
+            <a:ext cx="3749039" cy="2560320"/>
           </a:xfrm>
           <a:prstGeom prst="rect">
             <a:avLst/>
@@ -12245,30 +12028,200 @@
           </a:bodyPr>
           <a:lstStyle/>
           <a:p>
-            <a:pPr algn="ctr">
-              <a:defRPr sz="4800" b="1">
-                <a:solidFill>
-                  <a:srgbClr val="E2E4EA"/>
-                </a:solidFill>
-                <a:latin typeface="Calibri"/>
-              </a:defRPr>
-            </a:pPr>
-            <a:r>
-              <a:t>Thank You! 🎯</a:t>
-            </a:r>
-          </a:p>
-        </p:txBody>
-      </p:sp>
-      <p:sp>
-        <p:nvSpPr>
-          <p:cNvPr id="4" name="TextBox 3"/>
+            <a:pPr>
+              <a:defRPr sz="1400">
+                <a:solidFill>
+                  <a:srgbClr val="C8C8C8"/>
+                </a:solidFill>
+                <a:latin typeface="Courier New"/>
+              </a:defRPr>
+            </a:pPr>
+            <a:r>
+              <a:rPr dirty="0"/>
+              <a:t>Code:</a:t>
+            </a:r>
+            <a:br>
+              <a:rPr dirty="0"/>
+            </a:br>
+            <a:r>
+              <a:rPr dirty="0"/>
+              <a:t>chunks = </a:t>
+            </a:r>
+            <a:r>
+              <a:rPr dirty="0" err="1"/>
+              <a:t>text.split</a:t>
+            </a:r>
+            <a:r>
+              <a:rPr dirty="0"/>
+              <a:t>("\n")</a:t>
+            </a:r>
+          </a:p>
+          <a:p>
+            <a:br>
+              <a:rPr dirty="0"/>
+            </a:br>
+            <a:r>
+              <a:rPr dirty="0"/>
+              <a:t>✓ Pros:</a:t>
+            </a:r>
+          </a:p>
+          <a:p>
+            <a:pPr>
+              <a:defRPr sz="1400">
+                <a:solidFill>
+                  <a:srgbClr val="DCDCDC"/>
+                </a:solidFill>
+              </a:defRPr>
+            </a:pPr>
+            <a:r>
+              <a:rPr dirty="0"/>
+              <a:t>  • Simple &amp; fast</a:t>
+            </a:r>
+            <a:br>
+              <a:rPr dirty="0"/>
+            </a:br>
+            <a:r>
+              <a:rPr dirty="0"/>
+              <a:t>  • Preserves context</a:t>
+            </a:r>
+            <a:br>
+              <a:rPr dirty="0"/>
+            </a:br>
+            <a:r>
+              <a:rPr dirty="0"/>
+              <a:t>  • No overlap needed</a:t>
+            </a:r>
+          </a:p>
+          <a:p>
+            <a:br>
+              <a:rPr dirty="0"/>
+            </a:br>
+            <a:r>
+              <a:rPr dirty="0"/>
+              <a:t>✗ Cons:</a:t>
+            </a:r>
+          </a:p>
+          <a:p>
+            <a:pPr>
+              <a:defRPr sz="1400">
+                <a:solidFill>
+                  <a:srgbClr val="DCDCDC"/>
+                </a:solidFill>
+              </a:defRPr>
+            </a:pPr>
+            <a:r>
+              <a:rPr dirty="0"/>
+              <a:t>  • Unequal chunk sizes</a:t>
+            </a:r>
+            <a:br>
+              <a:rPr dirty="0"/>
+            </a:br>
+            <a:r>
+              <a:rPr dirty="0"/>
+              <a:t>  • May lose meaning if short</a:t>
+            </a:r>
+            <a:br>
+              <a:rPr dirty="0"/>
+            </a:br>
+            <a:r>
+              <a:rPr dirty="0"/>
+              <a:t>  • Paragraph-dependent</a:t>
+            </a:r>
+          </a:p>
+        </p:txBody>
+      </p:sp>
+      <p:sp>
+        <p:nvSpPr>
+          <p:cNvPr id="7" name="TextBox 6"/>
           <p:cNvSpPr txBox="1"/>
           <p:nvPr/>
         </p:nvSpPr>
         <p:spPr>
           <a:xfrm>
-            <a:off x="914400" y="3291840"/>
-            <a:ext cx="10360152" cy="548640"/>
+            <a:off x="6094411" y="1273126"/>
+            <a:ext cx="4114800" cy="457200"/>
+          </a:xfrm>
+          <a:prstGeom prst="rect">
+            <a:avLst/>
+          </a:prstGeom>
+          <a:noFill/>
+        </p:spPr>
+        <p:txBody>
+          <a:bodyPr wrap="none">
+            <a:spAutoFit/>
+          </a:bodyPr>
+          <a:lstStyle/>
+          <a:p>
+            <a:pPr>
+              <a:defRPr sz="2000" b="1">
+                <a:solidFill>
+                  <a:srgbClr val="FDCB6E"/>
+                </a:solidFill>
+              </a:defRPr>
+            </a:pPr>
+            <a:r>
+              <a:rPr dirty="0"/>
+              <a:t>Alternative methods</a:t>
+            </a:r>
+          </a:p>
+        </p:txBody>
+      </p:sp>
+      <p:sp>
+        <p:nvSpPr>
+          <p:cNvPr id="8" name="Rounded Rectangle 7"/>
+          <p:cNvSpPr/>
+          <p:nvPr/>
+        </p:nvSpPr>
+        <p:spPr>
+          <a:xfrm>
+            <a:off x="6094412" y="2286000"/>
+            <a:ext cx="4491526" cy="4023360"/>
+          </a:xfrm>
+          <a:prstGeom prst="roundRect">
+            <a:avLst/>
+          </a:prstGeom>
+          <a:solidFill>
+            <a:srgbClr val="1A1E2B"/>
+          </a:solidFill>
+          <a:ln>
+            <a:solidFill>
+              <a:srgbClr val="FDCB6E"/>
+            </a:solidFill>
+          </a:ln>
+        </p:spPr>
+        <p:style>
+          <a:lnRef idx="1">
+            <a:schemeClr val="accent1"/>
+          </a:lnRef>
+          <a:fillRef idx="3">
+            <a:schemeClr val="accent1"/>
+          </a:fillRef>
+          <a:effectRef idx="2">
+            <a:schemeClr val="accent1"/>
+          </a:effectRef>
+          <a:fontRef idx="minor">
+            <a:schemeClr val="lt1"/>
+          </a:fontRef>
+        </p:style>
+        <p:txBody>
+          <a:bodyPr rtlCol="0" anchor="ctr"/>
+          <a:lstStyle/>
+          <a:p>
+            <a:pPr algn="ctr"/>
+            <a:endParaRPr/>
+          </a:p>
+        </p:txBody>
+      </p:sp>
+      <p:sp>
+        <p:nvSpPr>
+          <p:cNvPr id="9" name="TextBox 8"/>
+          <p:cNvSpPr txBox="1"/>
+          <p:nvPr/>
+        </p:nvSpPr>
+        <p:spPr>
+          <a:xfrm>
+            <a:off x="6374215" y="2926080"/>
+            <a:ext cx="3931920" cy="2743200"/>
           </a:xfrm>
           <a:prstGeom prst="rect">
             <a:avLst/>
@@ -12281,52 +12234,169 @@
           </a:bodyPr>
           <a:lstStyle/>
           <a:p>
-            <a:pPr algn="ctr">
-              <a:defRPr sz="1800" b="0">
-                <a:solidFill>
-                  <a:srgbClr val="818CF8"/>
-                </a:solidFill>
-                <a:latin typeface="Calibri"/>
-              </a:defRPr>
-            </a:pPr>
-            <a:r>
-              <a:t>Try the live demo at  http://localhost:5050</a:t>
-            </a:r>
-          </a:p>
-        </p:txBody>
-      </p:sp>
-      <p:sp>
-        <p:nvSpPr>
-          <p:cNvPr id="5" name="TextBox 4"/>
-          <p:cNvSpPr txBox="1"/>
-          <p:nvPr/>
-        </p:nvSpPr>
-        <p:spPr>
-          <a:xfrm>
-            <a:off x="914400" y="3931920"/>
-            <a:ext cx="10360152" cy="731520"/>
-          </a:xfrm>
-          <a:prstGeom prst="rect">
-            <a:avLst/>
-          </a:prstGeom>
-          <a:noFill/>
-        </p:spPr>
-        <p:txBody>
-          <a:bodyPr wrap="square">
-            <a:spAutoFit/>
-          </a:bodyPr>
-          <a:lstStyle/>
-          <a:p>
-            <a:pPr algn="ctr">
-              <a:defRPr sz="1400" b="0">
-                <a:solidFill>
-                  <a:srgbClr val="6B7280"/>
-                </a:solidFill>
-                <a:latin typeface="Calibri"/>
-              </a:defRPr>
-            </a:pPr>
-            <a:r>
-              <a:t>GitHub: github.com/bhargavt1997/AG-Rag-Demo</a:t>
+            <a:pPr>
+              <a:defRPr sz="1400" b="1">
+                <a:solidFill>
+                  <a:srgbClr val="FFFFFF"/>
+                </a:solidFill>
+              </a:defRPr>
+            </a:pPr>
+            <a:r>
+              <a:rPr dirty="0"/>
+              <a:t>1️⃣ Fixed Size</a:t>
+            </a:r>
+          </a:p>
+          <a:p>
+            <a:pPr>
+              <a:defRPr sz="1200">
+                <a:solidFill>
+                  <a:srgbClr val="C8C8C8"/>
+                </a:solidFill>
+              </a:defRPr>
+            </a:pPr>
+            <a:r>
+              <a:rPr dirty="0"/>
+              <a:t>  • Split by word count (e.g., 256 words)</a:t>
+            </a:r>
+            <a:br>
+              <a:rPr dirty="0"/>
+            </a:br>
+            <a:r>
+              <a:rPr dirty="0"/>
+              <a:t>  • Consistent but may cut mid-sentence</a:t>
+            </a:r>
+          </a:p>
+          <a:p>
+            <a:pPr>
+              <a:defRPr sz="400"/>
+            </a:pPr>
+            <a:endParaRPr dirty="0"/>
+          </a:p>
+          <a:p>
+            <a:pPr>
+              <a:defRPr sz="1400" b="1">
+                <a:solidFill>
+                  <a:srgbClr val="FFFFFF"/>
+                </a:solidFill>
+              </a:defRPr>
+            </a:pPr>
+            <a:r>
+              <a:rPr dirty="0"/>
+              <a:t>2️⃣ Semantic Chunking</a:t>
+            </a:r>
+          </a:p>
+          <a:p>
+            <a:pPr>
+              <a:defRPr sz="1200">
+                <a:solidFill>
+                  <a:srgbClr val="C8C8C8"/>
+                </a:solidFill>
+              </a:defRPr>
+            </a:pPr>
+            <a:r>
+              <a:rPr dirty="0"/>
+              <a:t>  • Break at natural topic boundaries</a:t>
+            </a:r>
+            <a:br>
+              <a:rPr dirty="0"/>
+            </a:br>
+            <a:r>
+              <a:rPr dirty="0"/>
+              <a:t>  • Requires NLP (spacy, </a:t>
+            </a:r>
+            <a:r>
+              <a:rPr dirty="0" err="1"/>
+              <a:t>nltk</a:t>
+            </a:r>
+            <a:r>
+              <a:rPr dirty="0"/>
+              <a:t>)</a:t>
+            </a:r>
+          </a:p>
+          <a:p>
+            <a:pPr>
+              <a:defRPr sz="400"/>
+            </a:pPr>
+            <a:endParaRPr dirty="0"/>
+          </a:p>
+          <a:p>
+            <a:pPr>
+              <a:defRPr sz="1400" b="1">
+                <a:solidFill>
+                  <a:srgbClr val="FFFFFF"/>
+                </a:solidFill>
+              </a:defRPr>
+            </a:pPr>
+            <a:r>
+              <a:rPr dirty="0"/>
+              <a:t>3️⃣ Recursive Chunking</a:t>
+            </a:r>
+          </a:p>
+          <a:p>
+            <a:pPr>
+              <a:defRPr sz="1200">
+                <a:solidFill>
+                  <a:srgbClr val="C8C8C8"/>
+                </a:solidFill>
+              </a:defRPr>
+            </a:pPr>
+            <a:r>
+              <a:rPr dirty="0"/>
+              <a:t>  • Preserve structure (headers, lists)</a:t>
+            </a:r>
+            <a:br>
+              <a:rPr dirty="0"/>
+            </a:br>
+            <a:r>
+              <a:rPr dirty="0"/>
+              <a:t>  • Use </a:t>
+            </a:r>
+            <a:r>
+              <a:rPr dirty="0" err="1"/>
+              <a:t>langchain</a:t>
+            </a:r>
+            <a:r>
+              <a:rPr dirty="0"/>
+              <a:t>, tree-sitter</a:t>
+            </a:r>
+          </a:p>
+          <a:p>
+            <a:pPr>
+              <a:defRPr sz="400"/>
+            </a:pPr>
+            <a:endParaRPr dirty="0"/>
+          </a:p>
+          <a:p>
+            <a:pPr>
+              <a:defRPr sz="1400" b="1">
+                <a:solidFill>
+                  <a:srgbClr val="FFFFFF"/>
+                </a:solidFill>
+              </a:defRPr>
+            </a:pPr>
+            <a:r>
+              <a:rPr dirty="0"/>
+              <a:t>4️⃣ Sliding Window</a:t>
+            </a:r>
+          </a:p>
+          <a:p>
+            <a:pPr>
+              <a:defRPr sz="1200">
+                <a:solidFill>
+                  <a:srgbClr val="C8C8C8"/>
+                </a:solidFill>
+              </a:defRPr>
+            </a:pPr>
+            <a:r>
+              <a:rPr dirty="0"/>
+              <a:t>  • Overlapping chunks (e.g., 256 + 50 overlap)</a:t>
+            </a:r>
+            <a:br>
+              <a:rPr dirty="0"/>
+            </a:br>
+            <a:r>
+              <a:rPr dirty="0"/>
+              <a:t>  • Better context preservation</a:t>
             </a:r>
           </a:p>
         </p:txBody>
